--- a/project 1/LendingClub_Project1_final.pptx
+++ b/project 1/LendingClub_Project1_final.pptx
@@ -3339,7 +3339,7 @@
                 <a:ea typeface="Calibri" pitchFamily="34" charset="-122"/>
                 <a:cs typeface="Calibri" pitchFamily="34" charset="-120"/>
               </a:rPr>
-              <a:t>METHODOLOGY · DATA PREP &amp; FEATURES</a:t>
+              <a:t>METHODOLOGY · PREPARING THE DATA</a:t>
             </a:r>
             <a:endParaRPr lang="en-US" sz="1600" dirty="0"/>
           </a:p>
@@ -3378,7 +3378,7 @@
                 <a:ea typeface="Calibri Light" pitchFamily="34" charset="-122"/>
                 <a:cs typeface="Calibri Light" pitchFamily="34" charset="-120"/>
               </a:rPr>
-              <a:t>Feature Engineering</a:t>
+              <a:t>Turning Applications Into Useful Signals</a:t>
             </a:r>
             <a:endParaRPr lang="en-US" sz="3200" dirty="0"/>
           </a:p>
@@ -3440,7 +3440,7 @@
                 <a:ea typeface="Calibri" pitchFamily="34" charset="-122"/>
                 <a:cs typeface="Calibri" pitchFamily="34" charset="-120"/>
               </a:rPr>
-              <a:t>One stateless pipeline turns raw application fields into 36 model-ready features, identically on train and test, keeping target information out of every fold.</a:t>
+              <a:t>We translate each raw loan application into 36 consistent, comparable measures — applied the same way to every applicant, and never using the answer we are trying to predict.</a:t>
             </a:r>
             <a:endParaRPr lang="en-US" sz="1600" dirty="0"/>
           </a:p>
@@ -3504,7 +3504,7 @@
                 <a:ea typeface="Calibri" pitchFamily="34" charset="-122"/>
                 <a:cs typeface="Calibri" pitchFamily="34" charset="-120"/>
               </a:rPr>
-              <a:t>01 · DATA PREP</a:t>
+              <a:t>01 · CLEAN UP</a:t>
             </a:r>
             <a:endParaRPr lang="en-US" sz="1600" dirty="0"/>
           </a:p>
@@ -3543,7 +3543,7 @@
                 <a:ea typeface="Calibri" pitchFamily="34" charset="-122"/>
                 <a:cs typeface="Calibri" pitchFamily="34" charset="-120"/>
               </a:rPr>
-              <a:t>Cast NA numerics; drop leakage</a:t>
+              <a:t>Fix data quirks; remove unfair hints</a:t>
             </a:r>
             <a:endParaRPr lang="en-US" sz="1600" dirty="0"/>
           </a:p>
@@ -3607,7 +3607,7 @@
                 <a:ea typeface="Calibri" pitchFamily="34" charset="-122"/>
                 <a:cs typeface="Calibri" pitchFamily="34" charset="-120"/>
               </a:rPr>
-              <a:t>02 · FEATURE ENGINEERING</a:t>
+              <a:t>02 · BUILD MEASURES</a:t>
             </a:r>
             <a:endParaRPr lang="en-US" sz="1600" dirty="0"/>
           </a:p>
@@ -3646,7 +3646,7 @@
                 <a:ea typeface="Calibri" pitchFamily="34" charset="-122"/>
                 <a:cs typeface="Calibri" pitchFamily="34" charset="-120"/>
               </a:rPr>
-              <a:t>32 stateless + 4 fold-safe encodings</a:t>
+              <a:t>36 clear, comparable indicators</a:t>
             </a:r>
             <a:endParaRPr lang="en-US" sz="1600" dirty="0"/>
           </a:p>
@@ -3710,7 +3710,7 @@
                 <a:ea typeface="Calibri" pitchFamily="34" charset="-122"/>
                 <a:cs typeface="Calibri" pitchFamily="34" charset="-120"/>
               </a:rPr>
-              <a:t>03 · VALIDATION</a:t>
+              <a:t>03 · STRESS-TEST</a:t>
             </a:r>
             <a:endParaRPr lang="en-US" sz="1600" dirty="0"/>
           </a:p>
@@ -3749,7 +3749,7 @@
                 <a:ea typeface="Calibri" pitchFamily="34" charset="-122"/>
                 <a:cs typeface="Calibri" pitchFamily="34" charset="-120"/>
               </a:rPr>
-              <a:t>80/20 holdout + 5-fold CV</a:t>
+              <a:t>Checked on applicants it never saw</a:t>
             </a:r>
             <a:endParaRPr lang="en-US" sz="1600" dirty="0"/>
           </a:p>
@@ -3895,7 +3895,7 @@
                 <a:ea typeface="Calibri" pitchFamily="34" charset="-122"/>
                 <a:cs typeface="Calibri" pitchFamily="34" charset="-120"/>
               </a:rPr>
-              <a:t>Credit quality &amp; recodes</a:t>
+              <a:t>Credit strength</a:t>
             </a:r>
             <a:endParaRPr lang="en-US" sz="1600" dirty="0"/>
           </a:p>
@@ -3937,7 +3937,7 @@
                 <a:ea typeface="Calibri" pitchFamily="34" charset="-122"/>
                 <a:cs typeface="Calibri" pitchFamily="34" charset="-120"/>
               </a:rPr>
-              <a:t>fico, fico_band, term_months</a:t>
+              <a:t>Credit score, score tier, and loan length</a:t>
             </a:r>
             <a:endParaRPr lang="en-US" sz="1600" dirty="0"/>
           </a:p>
@@ -3979,7 +3979,7 @@
                 <a:ea typeface="Calibri" pitchFamily="34" charset="-122"/>
                 <a:cs typeface="Calibri" pitchFamily="34" charset="-120"/>
               </a:rPr>
-              <a:t>Collapses collinearity; adds geography</a:t>
+              <a:t>A cleaner read on each borrower</a:t>
             </a:r>
             <a:endParaRPr lang="en-US" sz="1600" dirty="0"/>
           </a:p>
@@ -4125,7 +4125,7 @@
                 <a:ea typeface="Calibri" pitchFamily="34" charset="-122"/>
                 <a:cs typeface="Calibri" pitchFamily="34" charset="-120"/>
               </a:rPr>
-              <a:t>Affordability ratios</a:t>
+              <a:t>Can they afford it?</a:t>
             </a:r>
             <a:endParaRPr lang="en-US" sz="1600" dirty="0"/>
           </a:p>
@@ -4167,7 +4167,7 @@
                 <a:ea typeface="Calibri" pitchFamily="34" charset="-122"/>
                 <a:cs typeface="Calibri" pitchFamily="34" charset="-120"/>
               </a:rPr>
-              <a:t>loan_to_income, bal_to_income</a:t>
+              <a:t>Loan size and debt compared to income</a:t>
             </a:r>
             <a:endParaRPr lang="en-US" sz="1600" dirty="0"/>
           </a:p>
@@ -4209,7 +4209,7 @@
                 <a:ea typeface="Calibri" pitchFamily="34" charset="-122"/>
                 <a:cs typeface="Calibri" pitchFamily="34" charset="-120"/>
               </a:rPr>
-              <a:t>Scales credit to ability to pay</a:t>
+              <a:t>Weighs borrowing against earnings</a:t>
             </a:r>
             <a:endParaRPr lang="en-US" sz="1600" dirty="0"/>
           </a:p>
@@ -4355,7 +4355,7 @@
                 <a:ea typeface="Calibri" pitchFamily="34" charset="-122"/>
                 <a:cs typeface="Calibri" pitchFamily="34" charset="-120"/>
               </a:rPr>
-              <a:t>Bands &amp; log tails</a:t>
+              <a:t>Risk groupings</a:t>
             </a:r>
             <a:endParaRPr lang="en-US" sz="1600" dirty="0"/>
           </a:p>
@@ -4397,7 +4397,7 @@
                 <a:ea typeface="Calibri" pitchFamily="34" charset="-122"/>
                 <a:cs typeface="Calibri" pitchFamily="34" charset="-120"/>
               </a:rPr>
-              <a:t>dti / util bands, log1p tails</a:t>
+              <a:t>Debt and credit-use tiers; extreme values smoothed</a:t>
             </a:r>
             <a:endParaRPr lang="en-US" sz="1600" dirty="0"/>
           </a:p>
@@ -4439,7 +4439,7 @@
                 <a:ea typeface="Calibri" pitchFamily="34" charset="-122"/>
                 <a:cs typeface="Calibri" pitchFamily="34" charset="-120"/>
               </a:rPr>
-              <a:t>Captures nonlinear risk; cuts skew</a:t>
+              <a:t>Sorts borrowers; tames outliers</a:t>
             </a:r>
             <a:endParaRPr lang="en-US" sz="1600" dirty="0"/>
           </a:p>
@@ -4585,7 +4585,7 @@
                 <a:ea typeface="Calibri" pitchFamily="34" charset="-122"/>
                 <a:cs typeface="Calibri" pitchFamily="34" charset="-120"/>
               </a:rPr>
-              <a:t>Interactions</a:t>
+              <a:t>Combined effects</a:t>
             </a:r>
             <a:endParaRPr lang="en-US" sz="1600" dirty="0"/>
           </a:p>
@@ -4627,7 +4627,7 @@
                 <a:ea typeface="Calibri" pitchFamily="34" charset="-122"/>
                 <a:cs typeface="Calibri" pitchFamily="34" charset="-120"/>
               </a:rPr>
-              <a:t>term_x_dti, fico_x_term, util_x_fico</a:t>
+              <a:t>How score, debt, and loan length work together</a:t>
             </a:r>
             <a:endParaRPr lang="en-US" sz="1600" dirty="0"/>
           </a:p>
@@ -4669,7 +4669,7 @@
                 <a:ea typeface="Calibri" pitchFamily="34" charset="-122"/>
                 <a:cs typeface="Calibri" pitchFamily="34" charset="-120"/>
               </a:rPr>
-              <a:t>Credit quality × loan structure</a:t>
+              <a:t>Catches risk visible only in combination</a:t>
             </a:r>
             <a:endParaRPr lang="en-US" sz="1600" dirty="0"/>
           </a:p>
@@ -4815,7 +4815,7 @@
                 <a:ea typeface="Calibri" pitchFamily="34" charset="-122"/>
                 <a:cs typeface="Calibri" pitchFamily="34" charset="-120"/>
               </a:rPr>
-              <a:t>Missingness &amp; history</a:t>
+              <a:t>Credit history gaps</a:t>
             </a:r>
             <a:endParaRPr lang="en-US" sz="1600" dirty="0"/>
           </a:p>
@@ -4857,7 +4857,7 @@
                 <a:ea typeface="Calibri" pitchFamily="34" charset="-122"/>
                 <a:cs typeface="Calibri" pitchFamily="34" charset="-120"/>
               </a:rPr>
-              <a:t>has_* flags, derog_score, file_age</a:t>
+              <a:t>Past issues, credit-file age, missing records</a:t>
             </a:r>
             <a:endParaRPr lang="en-US" sz="1600" dirty="0"/>
           </a:p>
@@ -4899,7 +4899,7 @@
                 <a:ea typeface="Calibri" pitchFamily="34" charset="-122"/>
                 <a:cs typeface="Calibri" pitchFamily="34" charset="-120"/>
               </a:rPr>
-              <a:t>Treats missing events as signal</a:t>
+              <a:t>Treats what is missing as meaningful</a:t>
             </a:r>
             <a:endParaRPr lang="en-US" sz="1600" dirty="0"/>
           </a:p>
@@ -5045,7 +5045,7 @@
                 <a:ea typeface="Calibri" pitchFamily="34" charset="-122"/>
                 <a:cs typeface="Calibri" pitchFamily="34" charset="-120"/>
               </a:rPr>
-              <a:t>Leakage-safe encodings</a:t>
+              <a:t>Location &amp; purpose</a:t>
             </a:r>
             <a:endParaRPr lang="en-US" sz="1600" dirty="0"/>
           </a:p>
@@ -5087,7 +5087,7 @@
                 <a:ea typeface="Calibri" pitchFamily="34" charset="-122"/>
                 <a:cs typeface="Calibri" pitchFamily="34" charset="-120"/>
               </a:rPr>
-              <a:t>addr_state_te, purpose_te, zip3_te</a:t>
+              <a:t>Home state, ZIP region, and reason for the loan</a:t>
             </a:r>
             <a:endParaRPr lang="en-US" sz="1600" dirty="0"/>
           </a:p>
@@ -5129,7 +5129,7 @@
                 <a:ea typeface="Calibri" pitchFamily="34" charset="-122"/>
                 <a:cs typeface="Calibri" pitchFamily="34" charset="-120"/>
               </a:rPr>
-              <a:t>Out-of-fold high-cardinality signal</a:t>
+              <a:t>Adds local patterns without unfair hints</a:t>
             </a:r>
             <a:endParaRPr lang="en-US" sz="1600" dirty="0"/>
           </a:p>
@@ -5196,7 +5196,7 @@
                 <a:ea typeface="Calibri" pitchFamily="34" charset="-122"/>
                 <a:cs typeface="Calibri" pitchFamily="34" charset="-120"/>
               </a:rPr>
-              <a:t>Guardrail:  </a:t>
+              <a:t>Safeguards: We remove anything that would not be known when someone applies, and every measure is built without using the outcome — so the results stay fair and trustworthy.</a:t>
             </a:r>
             <a:pPr indent="0" marL="0">
               <a:lnSpc>
@@ -5204,17 +5204,6 @@
               </a:lnSpc>
               <a:buNone/>
             </a:pPr>
-            <a:r>
-              <a:rPr lang="en-US" sz="1600" dirty="0">
-                <a:solidFill>
-                  <a:srgbClr val="1A1A1E"/>
-                </a:solidFill>
-                <a:latin typeface="Calibri" pitchFamily="34" charset="0"/>
-                <a:ea typeface="Calibri" pitchFamily="34" charset="-122"/>
-                <a:cs typeface="Calibri" pitchFamily="34" charset="-120"/>
-              </a:rPr>
-              <a:t>loan_status dropped before modeling; encodings fit inside folds; raw FICO bounds, term, emp_length, title &amp; zip replaced by engineered forms.</a:t>
-            </a:r>
             <a:endParaRPr lang="en-US" sz="1600" dirty="0"/>
           </a:p>
         </p:txBody>
@@ -5942,106 +5931,119 @@
                 <a:ea typeface="Calibri" pitchFamily="34" charset="-122"/>
                 <a:cs typeface="Calibri" pitchFamily="34" charset="-120"/>
               </a:rPr>
-              <a:t>All five families share the same engineered features and 80/20 split. CatBoost gives the lowest validation RMSE and is the submitted model.</a:t>
-            </a:r>
-            <a:endParaRPr lang="en-US" sz="1600" dirty="0"/>
-          </a:p>
-        </p:txBody>
-      </p:sp>
+              <a:t>All five models were trained on the same data and the same 80/20 split. Cross-validation error (CV RMSE) is the one score recorded for every model — CatBoost posts the lowest and is the model we submitted.</a:t>
+            </a:r>
+            <a:endParaRPr lang="en-US" sz="1600" dirty="0"/>
+          </a:p>
+        </p:txBody>
+      </p:sp>
+      <p:sp>
+        <p:nvSpPr>
+          <p:cNvPr id="8" name="Text 5"/>
+          <p:cNvSpPr/>
+          <p:nvPr/>
+        </p:nvSpPr>
+        <p:spPr>
+          <a:xfrm>
+            <a:off x="10972800" y="6364224"/>
+            <a:ext cx="649224" cy="310896"/>
+          </a:xfrm>
+          <a:prstGeom prst="rect">
+            <a:avLst/>
+          </a:prstGeom>
+          <a:noFill/>
+          <a:ln/>
+        </p:spPr>
+        <p:txBody>
+          <a:bodyPr wrap="square" lIns="0" tIns="0" rIns="0" bIns="0" rtlCol="0" anchor="ctr"/>
+          <a:lstStyle/>
+          <a:p>
+            <a:pPr algn="r" indent="0" marL="0">
+              <a:buNone/>
+            </a:pPr>
+            <a:r>
+              <a:rPr lang="en-US" sz="1600" dirty="0">
+                <a:solidFill>
+                  <a:srgbClr val="6F6F6F"/>
+                </a:solidFill>
+                <a:latin typeface="Calibri" pitchFamily="34" charset="0"/>
+                <a:ea typeface="Calibri" pitchFamily="34" charset="-122"/>
+                <a:cs typeface="Calibri" pitchFamily="34" charset="-120"/>
+              </a:rPr>
+              <a:t>05</a:t>
+            </a:r>
+            <a:endParaRPr lang="en-US" sz="1600" dirty="0"/>
+          </a:p>
+        </p:txBody>
+      </p:sp>
+      <p:pic>
+        <p:nvPicPr>
+          <p:cNvPr id="9" name="Picture 8" descr="cvrmse_chart.png"/>
+          <p:cNvPicPr>
+            <a:picLocks noChangeAspect="1"/>
+          </p:cNvPicPr>
+          <p:nvPr/>
+        </p:nvPicPr>
+        <p:blipFill>
+          <a:blip r:embed="rId4"/>
+          <a:stretch>
+            <a:fillRect/>
+          </a:stretch>
+        </p:blipFill>
+        <p:spPr>
+          <a:xfrm>
+            <a:off x="480000" y="2560000"/>
+            <a:ext cx="5850000" cy="3766000"/>
+          </a:xfrm>
+          <a:prstGeom prst="rect">
+            <a:avLst/>
+          </a:prstGeom>
+        </p:spPr>
+      </p:pic>
       <p:graphicFrame>
         <p:nvGraphicFramePr>
-          <p:cNvPr id="6" name="Table 0"/>
+          <p:cNvPr id="10" name="Table 9"/>
           <p:cNvGraphicFramePr>
             <a:graphicFrameLocks noGrp="1"/>
           </p:cNvGraphicFramePr>
-          <p:nvPr>
-            <p:extLst>
-              <p:ext uri="{D42A27DB-BD31-4B8C-83A1-F6EECF244321}">
-                <p14:modId xmlns:p14="http://schemas.microsoft.com/office/powerpoint/2010/main" val="1579011935"/>
-              </p:ext>
-            </p:extLst>
-          </p:nvPr>
+          <p:nvPr/>
         </p:nvGraphicFramePr>
         <p:xfrm>
-          <a:off x="566928" y="2331720"/>
-          <a:ext cx="11057839" cy="914400"/>
+          <a:off x="6600000" y="2560000"/>
+          <a:ext cx="5024767" cy="2710000"/>
         </p:xfrm>
         <a:graphic>
           <a:graphicData uri="http://schemas.openxmlformats.org/drawingml/2006/table">
             <a:tbl>
-              <a:tblPr/>
+              <a:tblPr>
+                <a:tableStyleId>{5C22544A-7EE6-4342-B048-85BDC9FD1C3A}</a:tableStyleId>
+              </a:tblPr>
               <a:tblGrid>
-                <a:gridCol w="2468880"/>
-                <a:gridCol w="1417320"/>
-                <a:gridCol w="1463040"/>
-                <a:gridCol w="1371600"/>
-                <a:gridCol w="1280160"/>
-                <a:gridCol w="3054096"/>
+                <a:gridCol w="1560000"/>
+                <a:gridCol w="920000"/>
+                <a:gridCol w="900000"/>
+                <a:gridCol w="860000"/>
+                <a:gridCol w="784767"/>
               </a:tblGrid>
-              <a:tr h="457200">
+              <a:tr h="360000">
                 <a:tc>
                   <a:txBody>
                     <a:bodyPr/>
                     <a:lstStyle/>
                     <a:p>
-                      <a:pPr algn="ctr" indent="0" marL="0">
-                        <a:buNone/>
-                      </a:pPr>
+                      <a:pPr algn="l"/>
                       <a:r>
-                        <a:rPr lang="en-US" sz="1600" b="1" dirty="0">
+                        <a:rPr sz="1150" b="1">
                           <a:solidFill>
                             <a:srgbClr val="FFFFFF"/>
                           </a:solidFill>
-                          <a:latin typeface="Calibri" pitchFamily="34" charset="0"/>
-                          <a:ea typeface="Calibri" pitchFamily="34" charset="-122"/>
-                          <a:cs typeface="Calibri" pitchFamily="34" charset="-120"/>
+                          <a:latin typeface="Calibri"/>
                         </a:rPr>
                         <a:t>Model</a:t>
                       </a:r>
-                      <a:endParaRPr lang="en-US" sz="1600" dirty="0">
-                        <a:latin typeface="Calibri" charset="0"/>
-                        <a:ea typeface="Calibri" charset="0"/>
-                        <a:cs typeface="Calibri" charset="0"/>
-                      </a:endParaRPr>
                     </a:p>
                   </a:txBody>
-                  <a:tcPr marL="91440" marR="91440" marT="45720" marB="45720" anchor="ctr">
-                    <a:lnL w="6350" cap="flat" cmpd="sng" algn="ctr">
-                      <a:solidFill>
-                        <a:srgbClr val="E5E0D8"/>
-                      </a:solidFill>
-                      <a:prstDash val="solid"/>
-                      <a:round/>
-                      <a:headEnd type="none" w="med" len="med"/>
-                      <a:tailEnd type="none" w="med" len="med"/>
-                    </a:lnL>
-                    <a:lnR w="6350" cap="flat" cmpd="sng" algn="ctr">
-                      <a:solidFill>
-                        <a:srgbClr val="E5E0D8"/>
-                      </a:solidFill>
-                      <a:prstDash val="solid"/>
-                      <a:round/>
-                      <a:headEnd type="none" w="med" len="med"/>
-                      <a:tailEnd type="none" w="med" len="med"/>
-                    </a:lnR>
-                    <a:lnT w="6350" cap="flat" cmpd="sng" algn="ctr">
-                      <a:solidFill>
-                        <a:srgbClr val="E5E0D8"/>
-                      </a:solidFill>
-                      <a:prstDash val="solid"/>
-                      <a:round/>
-                      <a:headEnd type="none" w="med" len="med"/>
-                      <a:tailEnd type="none" w="med" len="med"/>
-                    </a:lnT>
-                    <a:lnB w="6350" cap="flat" cmpd="sng" algn="ctr">
-                      <a:solidFill>
-                        <a:srgbClr val="E5E0D8"/>
-                      </a:solidFill>
-                      <a:prstDash val="solid"/>
-                      <a:round/>
-                      <a:headEnd type="none" w="med" len="med"/>
-                      <a:tailEnd type="none" w="med" len="med"/>
-                    </a:lnB>
+                  <a:tcPr anchor="ctr" marL="80000" marR="60000" marT="20000" marB="20000">
                     <a:solidFill>
                       <a:srgbClr val="333333"/>
                     </a:solidFill>
@@ -6052,64 +6054,19 @@
                     <a:bodyPr/>
                     <a:lstStyle/>
                     <a:p>
-                      <a:pPr algn="ctr" indent="0" marL="0">
-                        <a:buNone/>
-                      </a:pPr>
+                      <a:pPr algn="ctr"/>
                       <a:r>
-                        <a:rPr lang="en-US" sz="1600" b="1" dirty="0">
+                        <a:rPr sz="1150" b="1">
                           <a:solidFill>
                             <a:srgbClr val="FFFFFF"/>
                           </a:solidFill>
-                          <a:latin typeface="Calibri" pitchFamily="34" charset="0"/>
-                          <a:ea typeface="Calibri" pitchFamily="34" charset="-122"/>
-                          <a:cs typeface="Calibri" pitchFamily="34" charset="-120"/>
+                          <a:latin typeface="Calibri"/>
                         </a:rPr>
                         <a:t>CV RMSE</a:t>
                       </a:r>
-                      <a:endParaRPr lang="en-US" sz="1600" dirty="0">
-                        <a:latin typeface="Calibri" charset="0"/>
-                        <a:ea typeface="Calibri" charset="0"/>
-                        <a:cs typeface="Calibri" charset="0"/>
-                      </a:endParaRPr>
                     </a:p>
                   </a:txBody>
-                  <a:tcPr marL="91440" marR="91440" marT="45720" marB="45720" anchor="ctr">
-                    <a:lnL w="6350" cap="flat" cmpd="sng" algn="ctr">
-                      <a:solidFill>
-                        <a:srgbClr val="E5E0D8"/>
-                      </a:solidFill>
-                      <a:prstDash val="solid"/>
-                      <a:round/>
-                      <a:headEnd type="none" w="med" len="med"/>
-                      <a:tailEnd type="none" w="med" len="med"/>
-                    </a:lnL>
-                    <a:lnR w="6350" cap="flat" cmpd="sng" algn="ctr">
-                      <a:solidFill>
-                        <a:srgbClr val="E5E0D8"/>
-                      </a:solidFill>
-                      <a:prstDash val="solid"/>
-                      <a:round/>
-                      <a:headEnd type="none" w="med" len="med"/>
-                      <a:tailEnd type="none" w="med" len="med"/>
-                    </a:lnR>
-                    <a:lnT w="6350" cap="flat" cmpd="sng" algn="ctr">
-                      <a:solidFill>
-                        <a:srgbClr val="E5E0D8"/>
-                      </a:solidFill>
-                      <a:prstDash val="solid"/>
-                      <a:round/>
-                      <a:headEnd type="none" w="med" len="med"/>
-                      <a:tailEnd type="none" w="med" len="med"/>
-                    </a:lnT>
-                    <a:lnB w="6350" cap="flat" cmpd="sng" algn="ctr">
-                      <a:solidFill>
-                        <a:srgbClr val="E5E0D8"/>
-                      </a:solidFill>
-                      <a:prstDash val="solid"/>
-                      <a:round/>
-                      <a:headEnd type="none" w="med" len="med"/>
-                      <a:tailEnd type="none" w="med" len="med"/>
-                    </a:lnB>
+                  <a:tcPr anchor="ctr" marL="80000" marR="60000" marT="20000" marB="20000">
                     <a:solidFill>
                       <a:srgbClr val="333333"/>
                     </a:solidFill>
@@ -6120,64 +6077,19 @@
                     <a:bodyPr/>
                     <a:lstStyle/>
                     <a:p>
-                      <a:pPr algn="ctr" indent="0" marL="0">
-                        <a:buNone/>
-                      </a:pPr>
+                      <a:pPr algn="ctr"/>
                       <a:r>
-                        <a:rPr lang="en-US" sz="1600" b="1" dirty="0">
+                        <a:rPr sz="1150" b="1">
                           <a:solidFill>
                             <a:srgbClr val="FFFFFF"/>
                           </a:solidFill>
-                          <a:latin typeface="Calibri" pitchFamily="34" charset="0"/>
-                          <a:ea typeface="Calibri" pitchFamily="34" charset="-122"/>
-                          <a:cs typeface="Calibri" pitchFamily="34" charset="-120"/>
+                          <a:latin typeface="Calibri"/>
                         </a:rPr>
                         <a:t>Val RMSE</a:t>
                       </a:r>
-                      <a:endParaRPr lang="en-US" sz="1600" dirty="0">
-                        <a:latin typeface="Calibri" charset="0"/>
-                        <a:ea typeface="Calibri" charset="0"/>
-                        <a:cs typeface="Calibri" charset="0"/>
-                      </a:endParaRPr>
                     </a:p>
                   </a:txBody>
-                  <a:tcPr marL="91440" marR="91440" marT="45720" marB="45720" anchor="ctr">
-                    <a:lnL w="6350" cap="flat" cmpd="sng" algn="ctr">
-                      <a:solidFill>
-                        <a:srgbClr val="E5E0D8"/>
-                      </a:solidFill>
-                      <a:prstDash val="solid"/>
-                      <a:round/>
-                      <a:headEnd type="none" w="med" len="med"/>
-                      <a:tailEnd type="none" w="med" len="med"/>
-                    </a:lnL>
-                    <a:lnR w="6350" cap="flat" cmpd="sng" algn="ctr">
-                      <a:solidFill>
-                        <a:srgbClr val="E5E0D8"/>
-                      </a:solidFill>
-                      <a:prstDash val="solid"/>
-                      <a:round/>
-                      <a:headEnd type="none" w="med" len="med"/>
-                      <a:tailEnd type="none" w="med" len="med"/>
-                    </a:lnR>
-                    <a:lnT w="6350" cap="flat" cmpd="sng" algn="ctr">
-                      <a:solidFill>
-                        <a:srgbClr val="E5E0D8"/>
-                      </a:solidFill>
-                      <a:prstDash val="solid"/>
-                      <a:round/>
-                      <a:headEnd type="none" w="med" len="med"/>
-                      <a:tailEnd type="none" w="med" len="med"/>
-                    </a:lnT>
-                    <a:lnB w="6350" cap="flat" cmpd="sng" algn="ctr">
-                      <a:solidFill>
-                        <a:srgbClr val="E5E0D8"/>
-                      </a:solidFill>
-                      <a:prstDash val="solid"/>
-                      <a:round/>
-                      <a:headEnd type="none" w="med" len="med"/>
-                      <a:tailEnd type="none" w="med" len="med"/>
-                    </a:lnB>
+                  <a:tcPr anchor="ctr" marL="80000" marR="60000" marT="20000" marB="20000">
                     <a:solidFill>
                       <a:srgbClr val="333333"/>
                     </a:solidFill>
@@ -6188,64 +6100,19 @@
                     <a:bodyPr/>
                     <a:lstStyle/>
                     <a:p>
-                      <a:pPr algn="ctr" indent="0" marL="0">
-                        <a:buNone/>
-                      </a:pPr>
+                      <a:pPr algn="ctr"/>
                       <a:r>
-                        <a:rPr lang="en-US" sz="1600" b="1" dirty="0">
+                        <a:rPr sz="1150" b="1">
                           <a:solidFill>
                             <a:srgbClr val="FFFFFF"/>
                           </a:solidFill>
-                          <a:latin typeface="Calibri" pitchFamily="34" charset="0"/>
-                          <a:ea typeface="Calibri" pitchFamily="34" charset="-122"/>
-                          <a:cs typeface="Calibri" pitchFamily="34" charset="-120"/>
+                          <a:latin typeface="Calibri"/>
                         </a:rPr>
                         <a:t>Val MAE</a:t>
                       </a:r>
-                      <a:endParaRPr lang="en-US" sz="1600" dirty="0">
-                        <a:latin typeface="Calibri" charset="0"/>
-                        <a:ea typeface="Calibri" charset="0"/>
-                        <a:cs typeface="Calibri" charset="0"/>
-                      </a:endParaRPr>
                     </a:p>
                   </a:txBody>
-                  <a:tcPr marL="91440" marR="91440" marT="45720" marB="45720" anchor="ctr">
-                    <a:lnL w="6350" cap="flat" cmpd="sng" algn="ctr">
-                      <a:solidFill>
-                        <a:srgbClr val="E5E0D8"/>
-                      </a:solidFill>
-                      <a:prstDash val="solid"/>
-                      <a:round/>
-                      <a:headEnd type="none" w="med" len="med"/>
-                      <a:tailEnd type="none" w="med" len="med"/>
-                    </a:lnL>
-                    <a:lnR w="6350" cap="flat" cmpd="sng" algn="ctr">
-                      <a:solidFill>
-                        <a:srgbClr val="E5E0D8"/>
-                      </a:solidFill>
-                      <a:prstDash val="solid"/>
-                      <a:round/>
-                      <a:headEnd type="none" w="med" len="med"/>
-                      <a:tailEnd type="none" w="med" len="med"/>
-                    </a:lnR>
-                    <a:lnT w="6350" cap="flat" cmpd="sng" algn="ctr">
-                      <a:solidFill>
-                        <a:srgbClr val="E5E0D8"/>
-                      </a:solidFill>
-                      <a:prstDash val="solid"/>
-                      <a:round/>
-                      <a:headEnd type="none" w="med" len="med"/>
-                      <a:tailEnd type="none" w="med" len="med"/>
-                    </a:lnT>
-                    <a:lnB w="6350" cap="flat" cmpd="sng" algn="ctr">
-                      <a:solidFill>
-                        <a:srgbClr val="E5E0D8"/>
-                      </a:solidFill>
-                      <a:prstDash val="solid"/>
-                      <a:round/>
-                      <a:headEnd type="none" w="med" len="med"/>
-                      <a:tailEnd type="none" w="med" len="med"/>
-                    </a:lnB>
+                  <a:tcPr anchor="ctr" marL="80000" marR="60000" marT="20000" marB="20000">
                     <a:solidFill>
                       <a:srgbClr val="333333"/>
                     </a:solidFill>
@@ -6256,66 +6123,46 @@
                     <a:bodyPr/>
                     <a:lstStyle/>
                     <a:p>
-                      <a:pPr algn="ctr" indent="0" marL="0">
-                        <a:buNone/>
-                      </a:pPr>
+                      <a:pPr algn="ctr"/>
                       <a:r>
-                        <a:rPr lang="en-US" sz="1600" b="1" dirty="0">
+                        <a:rPr sz="1150" b="1">
                           <a:solidFill>
                             <a:srgbClr val="FFFFFF"/>
                           </a:solidFill>
-                          <a:latin typeface="Calibri" pitchFamily="34" charset="0"/>
-                          <a:ea typeface="Calibri" pitchFamily="34" charset="-122"/>
-                          <a:cs typeface="Calibri" pitchFamily="34" charset="-120"/>
+                          <a:latin typeface="Calibri"/>
                         </a:rPr>
                         <a:t>Val R²</a:t>
                       </a:r>
-                      <a:endParaRPr lang="en-US" sz="1600" dirty="0">
-                        <a:latin typeface="Calibri" charset="0"/>
-                        <a:ea typeface="Calibri" charset="0"/>
-                        <a:cs typeface="Calibri" charset="0"/>
-                      </a:endParaRPr>
                     </a:p>
                   </a:txBody>
-                  <a:tcPr marL="91440" marR="91440" marT="45720" marB="45720" anchor="ctr">
-                    <a:lnL w="6350" cap="flat" cmpd="sng" algn="ctr">
-                      <a:solidFill>
-                        <a:srgbClr val="E5E0D8"/>
-                      </a:solidFill>
-                      <a:prstDash val="solid"/>
-                      <a:round/>
-                      <a:headEnd type="none" w="med" len="med"/>
-                      <a:tailEnd type="none" w="med" len="med"/>
-                    </a:lnL>
-                    <a:lnR w="6350" cap="flat" cmpd="sng" algn="ctr">
-                      <a:solidFill>
-                        <a:srgbClr val="E5E0D8"/>
-                      </a:solidFill>
-                      <a:prstDash val="solid"/>
-                      <a:round/>
-                      <a:headEnd type="none" w="med" len="med"/>
-                      <a:tailEnd type="none" w="med" len="med"/>
-                    </a:lnR>
-                    <a:lnT w="6350" cap="flat" cmpd="sng" algn="ctr">
-                      <a:solidFill>
-                        <a:srgbClr val="E5E0D8"/>
-                      </a:solidFill>
-                      <a:prstDash val="solid"/>
-                      <a:round/>
-                      <a:headEnd type="none" w="med" len="med"/>
-                      <a:tailEnd type="none" w="med" len="med"/>
-                    </a:lnT>
-                    <a:lnB w="6350" cap="flat" cmpd="sng" algn="ctr">
-                      <a:solidFill>
-                        <a:srgbClr val="E5E0D8"/>
-                      </a:solidFill>
-                      <a:prstDash val="solid"/>
-                      <a:round/>
-                      <a:headEnd type="none" w="med" len="med"/>
-                      <a:tailEnd type="none" w="med" len="med"/>
-                    </a:lnB>
+                  <a:tcPr anchor="ctr" marL="80000" marR="60000" marT="20000" marB="20000">
                     <a:solidFill>
                       <a:srgbClr val="333333"/>
+                    </a:solidFill>
+                  </a:tcPr>
+                </a:tc>
+              </a:tr>
+              <a:tr h="470000">
+                <a:tc>
+                  <a:txBody>
+                    <a:bodyPr/>
+                    <a:lstStyle/>
+                    <a:p>
+                      <a:pPr algn="l"/>
+                      <a:r>
+                        <a:rPr sz="1200" b="0">
+                          <a:solidFill>
+                            <a:srgbClr val="1A1A1E"/>
+                          </a:solidFill>
+                          <a:latin typeface="Calibri"/>
+                        </a:rPr>
+                        <a:t>Decision Tree</a:t>
+                      </a:r>
+                    </a:p>
+                  </a:txBody>
+                  <a:tcPr anchor="ctr" marL="80000" marR="60000" marT="20000" marB="20000">
+                    <a:solidFill>
+                      <a:srgbClr val="FFFFFF"/>
                     </a:solidFill>
                   </a:tcPr>
                 </a:tc>
@@ -6324,134 +6171,22 @@
                     <a:bodyPr/>
                     <a:lstStyle/>
                     <a:p>
-                      <a:pPr algn="l" indent="0" marL="0">
-                        <a:buNone/>
-                      </a:pPr>
+                      <a:pPr algn="ctr"/>
                       <a:r>
-                        <a:rPr lang="en-US" sz="1600" b="1" dirty="0">
-                          <a:solidFill>
-                            <a:srgbClr val="FFFFFF"/>
-                          </a:solidFill>
-                          <a:latin typeface="Calibri" pitchFamily="34" charset="0"/>
-                          <a:ea typeface="Calibri" pitchFamily="34" charset="-122"/>
-                          <a:cs typeface="Calibri" pitchFamily="34" charset="-120"/>
-                        </a:rPr>
-                        <a:t>Notes</a:t>
-                      </a:r>
-                      <a:endParaRPr lang="en-US" sz="1600" dirty="0">
-                        <a:latin typeface="Calibri" charset="0"/>
-                        <a:ea typeface="Calibri" charset="0"/>
-                        <a:cs typeface="Calibri" charset="0"/>
-                      </a:endParaRPr>
-                    </a:p>
-                  </a:txBody>
-                  <a:tcPr marL="91440" marR="91440" marT="45720" marB="45720" anchor="ctr">
-                    <a:lnL w="6350" cap="flat" cmpd="sng" algn="ctr">
-                      <a:solidFill>
-                        <a:srgbClr val="E5E0D8"/>
-                      </a:solidFill>
-                      <a:prstDash val="solid"/>
-                      <a:round/>
-                      <a:headEnd type="none" w="med" len="med"/>
-                      <a:tailEnd type="none" w="med" len="med"/>
-                    </a:lnL>
-                    <a:lnR w="6350" cap="flat" cmpd="sng" algn="ctr">
-                      <a:solidFill>
-                        <a:srgbClr val="E5E0D8"/>
-                      </a:solidFill>
-                      <a:prstDash val="solid"/>
-                      <a:round/>
-                      <a:headEnd type="none" w="med" len="med"/>
-                      <a:tailEnd type="none" w="med" len="med"/>
-                    </a:lnR>
-                    <a:lnT w="6350" cap="flat" cmpd="sng" algn="ctr">
-                      <a:solidFill>
-                        <a:srgbClr val="E5E0D8"/>
-                      </a:solidFill>
-                      <a:prstDash val="solid"/>
-                      <a:round/>
-                      <a:headEnd type="none" w="med" len="med"/>
-                      <a:tailEnd type="none" w="med" len="med"/>
-                    </a:lnT>
-                    <a:lnB w="6350" cap="flat" cmpd="sng" algn="ctr">
-                      <a:solidFill>
-                        <a:srgbClr val="E5E0D8"/>
-                      </a:solidFill>
-                      <a:prstDash val="solid"/>
-                      <a:round/>
-                      <a:headEnd type="none" w="med" len="med"/>
-                      <a:tailEnd type="none" w="med" len="med"/>
-                    </a:lnB>
-                    <a:solidFill>
-                      <a:srgbClr val="333333"/>
-                    </a:solidFill>
-                  </a:tcPr>
-                </a:tc>
-              </a:tr>
-              <a:tr h="566928">
-                <a:tc>
-                  <a:txBody>
-                    <a:bodyPr/>
-                    <a:lstStyle/>
-                    <a:p>
-                      <a:pPr algn="l" indent="0" marL="0">
-                        <a:buNone/>
-                      </a:pPr>
-                      <a:r>
-                        <a:rPr lang="en-US" sz="1600" dirty="0">
+                        <a:rPr sz="1200" b="0">
                           <a:solidFill>
                             <a:srgbClr val="1A1A1E"/>
                           </a:solidFill>
-                          <a:latin typeface="Calibri" pitchFamily="34" charset="0"/>
-                          <a:ea typeface="Calibri" pitchFamily="34" charset="-122"/>
-                          <a:cs typeface="Calibri" pitchFamily="34" charset="-120"/>
+                          <a:latin typeface="Calibri"/>
                         </a:rPr>
-                        <a:t>Decision Tree</a:t>
+                        <a:t>4.2781</a:t>
                       </a:r>
-                      <a:endParaRPr lang="en-US" sz="1600" dirty="0">
-                        <a:latin typeface="Calibri" charset="0"/>
-                        <a:ea typeface="Calibri" charset="0"/>
-                        <a:cs typeface="Calibri" charset="0"/>
-                      </a:endParaRPr>
                     </a:p>
                   </a:txBody>
-                  <a:tcPr marL="91440" marR="91440" marT="45720" marB="45720" anchor="ctr">
-                    <a:lnL w="6350" cap="flat" cmpd="sng" algn="ctr">
-                      <a:solidFill>
-                        <a:srgbClr val="E5E0D8"/>
-                      </a:solidFill>
-                      <a:prstDash val="solid"/>
-                      <a:round/>
-                      <a:headEnd type="none" w="med" len="med"/>
-                      <a:tailEnd type="none" w="med" len="med"/>
-                    </a:lnL>
-                    <a:lnR w="6350" cap="flat" cmpd="sng" algn="ctr">
-                      <a:solidFill>
-                        <a:srgbClr val="E5E0D8"/>
-                      </a:solidFill>
-                      <a:prstDash val="solid"/>
-                      <a:round/>
-                      <a:headEnd type="none" w="med" len="med"/>
-                      <a:tailEnd type="none" w="med" len="med"/>
-                    </a:lnR>
-                    <a:lnT w="6350" cap="flat" cmpd="sng" algn="ctr">
-                      <a:solidFill>
-                        <a:srgbClr val="E5E0D8"/>
-                      </a:solidFill>
-                      <a:prstDash val="solid"/>
-                      <a:round/>
-                      <a:headEnd type="none" w="med" len="med"/>
-                      <a:tailEnd type="none" w="med" len="med"/>
-                    </a:lnT>
-                    <a:lnB w="6350" cap="flat" cmpd="sng" algn="ctr">
-                      <a:solidFill>
-                        <a:srgbClr val="E5E0D8"/>
-                      </a:solidFill>
-                      <a:prstDash val="solid"/>
-                      <a:round/>
-                      <a:headEnd type="none" w="med" len="med"/>
-                      <a:tailEnd type="none" w="med" len="med"/>
-                    </a:lnB>
+                  <a:tcPr anchor="ctr" marL="80000" marR="60000" marT="20000" marB="20000">
+                    <a:solidFill>
+                      <a:srgbClr val="FFFFFF"/>
+                    </a:solidFill>
                   </a:tcPr>
                 </a:tc>
                 <a:tc>
@@ -6459,64 +6194,22 @@
                     <a:bodyPr/>
                     <a:lstStyle/>
                     <a:p>
-                      <a:pPr algn="ctr" indent="0" marL="0">
-                        <a:buNone/>
-                      </a:pPr>
+                      <a:pPr algn="ctr"/>
                       <a:r>
-                        <a:rPr lang="en-US" sz="1600" dirty="0">
+                        <a:rPr sz="1200" b="0">
                           <a:solidFill>
-                            <a:srgbClr val="1A1A1E"/>
+                            <a:srgbClr val="6E6A5C"/>
                           </a:solidFill>
-                          <a:latin typeface="Calibri" pitchFamily="34" charset="0"/>
-                          <a:ea typeface="Calibri" pitchFamily="34" charset="-122"/>
-                          <a:cs typeface="Calibri" pitchFamily="34" charset="-120"/>
+                          <a:latin typeface="Calibri"/>
                         </a:rPr>
                         <a:t>—</a:t>
                       </a:r>
-                      <a:endParaRPr lang="en-US" sz="1600" dirty="0">
-                        <a:latin typeface="Calibri" charset="0"/>
-                        <a:ea typeface="Calibri" charset="0"/>
-                        <a:cs typeface="Calibri" charset="0"/>
-                      </a:endParaRPr>
                     </a:p>
                   </a:txBody>
-                  <a:tcPr marL="91440" marR="91440" marT="45720" marB="45720" anchor="ctr">
-                    <a:lnL w="6350" cap="flat" cmpd="sng" algn="ctr">
-                      <a:solidFill>
-                        <a:srgbClr val="E5E0D8"/>
-                      </a:solidFill>
-                      <a:prstDash val="solid"/>
-                      <a:round/>
-                      <a:headEnd type="none" w="med" len="med"/>
-                      <a:tailEnd type="none" w="med" len="med"/>
-                    </a:lnL>
-                    <a:lnR w="6350" cap="flat" cmpd="sng" algn="ctr">
-                      <a:solidFill>
-                        <a:srgbClr val="E5E0D8"/>
-                      </a:solidFill>
-                      <a:prstDash val="solid"/>
-                      <a:round/>
-                      <a:headEnd type="none" w="med" len="med"/>
-                      <a:tailEnd type="none" w="med" len="med"/>
-                    </a:lnR>
-                    <a:lnT w="6350" cap="flat" cmpd="sng" algn="ctr">
-                      <a:solidFill>
-                        <a:srgbClr val="E5E0D8"/>
-                      </a:solidFill>
-                      <a:prstDash val="solid"/>
-                      <a:round/>
-                      <a:headEnd type="none" w="med" len="med"/>
-                      <a:tailEnd type="none" w="med" len="med"/>
-                    </a:lnT>
-                    <a:lnB w="6350" cap="flat" cmpd="sng" algn="ctr">
-                      <a:solidFill>
-                        <a:srgbClr val="E5E0D8"/>
-                      </a:solidFill>
-                      <a:prstDash val="solid"/>
-                      <a:round/>
-                      <a:headEnd type="none" w="med" len="med"/>
-                      <a:tailEnd type="none" w="med" len="med"/>
-                    </a:lnB>
+                  <a:tcPr anchor="ctr" marL="80000" marR="60000" marT="20000" marB="20000">
+                    <a:solidFill>
+                      <a:srgbClr val="FFFFFF"/>
+                    </a:solidFill>
                   </a:tcPr>
                 </a:tc>
                 <a:tc>
@@ -6524,64 +6217,22 @@
                     <a:bodyPr/>
                     <a:lstStyle/>
                     <a:p>
-                      <a:pPr algn="ctr" indent="0" marL="0">
-                        <a:buNone/>
-                      </a:pPr>
+                      <a:pPr algn="ctr"/>
                       <a:r>
-                        <a:rPr lang="en-US" sz="1600" dirty="0">
+                        <a:rPr sz="1200" b="0">
                           <a:solidFill>
-                            <a:srgbClr val="1A1A1E"/>
+                            <a:srgbClr val="6E6A5C"/>
                           </a:solidFill>
-                          <a:latin typeface="Calibri" pitchFamily="34" charset="0"/>
-                          <a:ea typeface="Calibri" pitchFamily="34" charset="-122"/>
-                          <a:cs typeface="Calibri" pitchFamily="34" charset="-120"/>
+                          <a:latin typeface="Calibri"/>
                         </a:rPr>
                         <a:t>—</a:t>
                       </a:r>
-                      <a:endParaRPr lang="en-US" sz="1600" dirty="0">
-                        <a:latin typeface="Calibri" charset="0"/>
-                        <a:ea typeface="Calibri" charset="0"/>
-                        <a:cs typeface="Calibri" charset="0"/>
-                      </a:endParaRPr>
                     </a:p>
                   </a:txBody>
-                  <a:tcPr marL="91440" marR="91440" marT="45720" marB="45720" anchor="ctr">
-                    <a:lnL w="6350" cap="flat" cmpd="sng" algn="ctr">
-                      <a:solidFill>
-                        <a:srgbClr val="E5E0D8"/>
-                      </a:solidFill>
-                      <a:prstDash val="solid"/>
-                      <a:round/>
-                      <a:headEnd type="none" w="med" len="med"/>
-                      <a:tailEnd type="none" w="med" len="med"/>
-                    </a:lnL>
-                    <a:lnR w="6350" cap="flat" cmpd="sng" algn="ctr">
-                      <a:solidFill>
-                        <a:srgbClr val="E5E0D8"/>
-                      </a:solidFill>
-                      <a:prstDash val="solid"/>
-                      <a:round/>
-                      <a:headEnd type="none" w="med" len="med"/>
-                      <a:tailEnd type="none" w="med" len="med"/>
-                    </a:lnR>
-                    <a:lnT w="6350" cap="flat" cmpd="sng" algn="ctr">
-                      <a:solidFill>
-                        <a:srgbClr val="E5E0D8"/>
-                      </a:solidFill>
-                      <a:prstDash val="solid"/>
-                      <a:round/>
-                      <a:headEnd type="none" w="med" len="med"/>
-                      <a:tailEnd type="none" w="med" len="med"/>
-                    </a:lnT>
-                    <a:lnB w="6350" cap="flat" cmpd="sng" algn="ctr">
-                      <a:solidFill>
-                        <a:srgbClr val="E5E0D8"/>
-                      </a:solidFill>
-                      <a:prstDash val="solid"/>
-                      <a:round/>
-                      <a:headEnd type="none" w="med" len="med"/>
-                      <a:tailEnd type="none" w="med" len="med"/>
-                    </a:lnB>
+                  <a:tcPr anchor="ctr" marL="80000" marR="60000" marT="20000" marB="20000">
+                    <a:solidFill>
+                      <a:srgbClr val="FFFFFF"/>
+                    </a:solidFill>
                   </a:tcPr>
                 </a:tc>
                 <a:tc>
@@ -6589,64 +6240,47 @@
                     <a:bodyPr/>
                     <a:lstStyle/>
                     <a:p>
-                      <a:pPr algn="ctr" indent="0" marL="0">
-                        <a:buNone/>
-                      </a:pPr>
+                      <a:pPr algn="ctr"/>
                       <a:r>
-                        <a:rPr lang="en-US" sz="1600" dirty="0">
+                        <a:rPr sz="1200" b="0">
+                          <a:solidFill>
+                            <a:srgbClr val="6E6A5C"/>
+                          </a:solidFill>
+                          <a:latin typeface="Calibri"/>
+                        </a:rPr>
+                        <a:t>—</a:t>
+                      </a:r>
+                    </a:p>
+                  </a:txBody>
+                  <a:tcPr anchor="ctr" marL="80000" marR="60000" marT="20000" marB="20000">
+                    <a:solidFill>
+                      <a:srgbClr val="FFFFFF"/>
+                    </a:solidFill>
+                  </a:tcPr>
+                </a:tc>
+              </a:tr>
+              <a:tr h="470000">
+                <a:tc>
+                  <a:txBody>
+                    <a:bodyPr/>
+                    <a:lstStyle/>
+                    <a:p>
+                      <a:pPr algn="l"/>
+                      <a:r>
+                        <a:rPr sz="1200" b="0">
                           <a:solidFill>
                             <a:srgbClr val="1A1A1E"/>
                           </a:solidFill>
-                          <a:latin typeface="Calibri" pitchFamily="34" charset="0"/>
-                          <a:ea typeface="Calibri" pitchFamily="34" charset="-122"/>
-                          <a:cs typeface="Calibri" pitchFamily="34" charset="-120"/>
+                          <a:latin typeface="Calibri"/>
                         </a:rPr>
-                        <a:t>—</a:t>
+                        <a:t>Random Forest</a:t>
                       </a:r>
-                      <a:endParaRPr lang="en-US" sz="1600" dirty="0">
-                        <a:latin typeface="Calibri" charset="0"/>
-                        <a:ea typeface="Calibri" charset="0"/>
-                        <a:cs typeface="Calibri" charset="0"/>
-                      </a:endParaRPr>
                     </a:p>
                   </a:txBody>
-                  <a:tcPr marL="91440" marR="91440" marT="45720" marB="45720" anchor="ctr">
-                    <a:lnL w="6350" cap="flat" cmpd="sng" algn="ctr">
-                      <a:solidFill>
-                        <a:srgbClr val="E5E0D8"/>
-                      </a:solidFill>
-                      <a:prstDash val="solid"/>
-                      <a:round/>
-                      <a:headEnd type="none" w="med" len="med"/>
-                      <a:tailEnd type="none" w="med" len="med"/>
-                    </a:lnL>
-                    <a:lnR w="6350" cap="flat" cmpd="sng" algn="ctr">
-                      <a:solidFill>
-                        <a:srgbClr val="E5E0D8"/>
-                      </a:solidFill>
-                      <a:prstDash val="solid"/>
-                      <a:round/>
-                      <a:headEnd type="none" w="med" len="med"/>
-                      <a:tailEnd type="none" w="med" len="med"/>
-                    </a:lnR>
-                    <a:lnT w="6350" cap="flat" cmpd="sng" algn="ctr">
-                      <a:solidFill>
-                        <a:srgbClr val="E5E0D8"/>
-                      </a:solidFill>
-                      <a:prstDash val="solid"/>
-                      <a:round/>
-                      <a:headEnd type="none" w="med" len="med"/>
-                      <a:tailEnd type="none" w="med" len="med"/>
-                    </a:lnT>
-                    <a:lnB w="6350" cap="flat" cmpd="sng" algn="ctr">
-                      <a:solidFill>
-                        <a:srgbClr val="E5E0D8"/>
-                      </a:solidFill>
-                      <a:prstDash val="solid"/>
-                      <a:round/>
-                      <a:headEnd type="none" w="med" len="med"/>
-                      <a:tailEnd type="none" w="med" len="med"/>
-                    </a:lnB>
+                  <a:tcPr anchor="ctr" marL="80000" marR="60000" marT="20000" marB="20000">
+                    <a:solidFill>
+                      <a:srgbClr val="F7F4EC"/>
+                    </a:solidFill>
                   </a:tcPr>
                 </a:tc>
                 <a:tc>
@@ -6654,64 +6288,22 @@
                     <a:bodyPr/>
                     <a:lstStyle/>
                     <a:p>
-                      <a:pPr algn="ctr" indent="0" marL="0">
-                        <a:buNone/>
-                      </a:pPr>
+                      <a:pPr algn="ctr"/>
                       <a:r>
-                        <a:rPr lang="en-US" sz="1600" dirty="0">
+                        <a:rPr sz="1200" b="0">
                           <a:solidFill>
                             <a:srgbClr val="1A1A1E"/>
                           </a:solidFill>
-                          <a:latin typeface="Calibri" pitchFamily="34" charset="0"/>
-                          <a:ea typeface="Calibri" pitchFamily="34" charset="-122"/>
-                          <a:cs typeface="Calibri" pitchFamily="34" charset="-120"/>
+                          <a:latin typeface="Calibri"/>
                         </a:rPr>
-                        <a:t>—</a:t>
+                        <a:t>4.0723</a:t>
                       </a:r>
-                      <a:endParaRPr lang="en-US" sz="1600" dirty="0">
-                        <a:latin typeface="Calibri" charset="0"/>
-                        <a:ea typeface="Calibri" charset="0"/>
-                        <a:cs typeface="Calibri" charset="0"/>
-                      </a:endParaRPr>
                     </a:p>
                   </a:txBody>
-                  <a:tcPr marL="91440" marR="91440" marT="45720" marB="45720" anchor="ctr">
-                    <a:lnL w="6350" cap="flat" cmpd="sng" algn="ctr">
-                      <a:solidFill>
-                        <a:srgbClr val="E5E0D8"/>
-                      </a:solidFill>
-                      <a:prstDash val="solid"/>
-                      <a:round/>
-                      <a:headEnd type="none" w="med" len="med"/>
-                      <a:tailEnd type="none" w="med" len="med"/>
-                    </a:lnL>
-                    <a:lnR w="6350" cap="flat" cmpd="sng" algn="ctr">
-                      <a:solidFill>
-                        <a:srgbClr val="E5E0D8"/>
-                      </a:solidFill>
-                      <a:prstDash val="solid"/>
-                      <a:round/>
-                      <a:headEnd type="none" w="med" len="med"/>
-                      <a:tailEnd type="none" w="med" len="med"/>
-                    </a:lnR>
-                    <a:lnT w="6350" cap="flat" cmpd="sng" algn="ctr">
-                      <a:solidFill>
-                        <a:srgbClr val="E5E0D8"/>
-                      </a:solidFill>
-                      <a:prstDash val="solid"/>
-                      <a:round/>
-                      <a:headEnd type="none" w="med" len="med"/>
-                      <a:tailEnd type="none" w="med" len="med"/>
-                    </a:lnT>
-                    <a:lnB w="6350" cap="flat" cmpd="sng" algn="ctr">
-                      <a:solidFill>
-                        <a:srgbClr val="E5E0D8"/>
-                      </a:solidFill>
-                      <a:prstDash val="solid"/>
-                      <a:round/>
-                      <a:headEnd type="none" w="med" len="med"/>
-                      <a:tailEnd type="none" w="med" len="med"/>
-                    </a:lnB>
+                  <a:tcPr anchor="ctr" marL="80000" marR="60000" marT="20000" marB="20000">
+                    <a:solidFill>
+                      <a:srgbClr val="F7F4EC"/>
+                    </a:solidFill>
                   </a:tcPr>
                 </a:tc>
                 <a:tc>
@@ -6719,131 +6311,22 @@
                     <a:bodyPr/>
                     <a:lstStyle/>
                     <a:p>
-                      <a:pPr algn="l" indent="0" marL="0">
-                        <a:buNone/>
-                      </a:pPr>
+                      <a:pPr algn="ctr"/>
                       <a:r>
-                        <a:rPr lang="en-US" sz="1600" dirty="0">
-                          <a:solidFill>
-                            <a:srgbClr val="6F6F6F"/>
-                          </a:solidFill>
-                          <a:latin typeface="Calibri" pitchFamily="34" charset="0"/>
-                          <a:ea typeface="Calibri" pitchFamily="34" charset="-122"/>
-                          <a:cs typeface="Calibri" pitchFamily="34" charset="-120"/>
-                        </a:rPr>
-                        <a:t>Single-tree baseline</a:t>
-                      </a:r>
-                      <a:endParaRPr lang="en-US" sz="1600" dirty="0">
-                        <a:latin typeface="Calibri" charset="0"/>
-                        <a:ea typeface="Calibri" charset="0"/>
-                        <a:cs typeface="Calibri" charset="0"/>
-                      </a:endParaRPr>
-                    </a:p>
-                  </a:txBody>
-                  <a:tcPr marL="91440" marR="91440" marT="45720" marB="45720" anchor="ctr">
-                    <a:lnL w="6350" cap="flat" cmpd="sng" algn="ctr">
-                      <a:solidFill>
-                        <a:srgbClr val="E5E0D8"/>
-                      </a:solidFill>
-                      <a:prstDash val="solid"/>
-                      <a:round/>
-                      <a:headEnd type="none" w="med" len="med"/>
-                      <a:tailEnd type="none" w="med" len="med"/>
-                    </a:lnL>
-                    <a:lnR w="6350" cap="flat" cmpd="sng" algn="ctr">
-                      <a:solidFill>
-                        <a:srgbClr val="E5E0D8"/>
-                      </a:solidFill>
-                      <a:prstDash val="solid"/>
-                      <a:round/>
-                      <a:headEnd type="none" w="med" len="med"/>
-                      <a:tailEnd type="none" w="med" len="med"/>
-                    </a:lnR>
-                    <a:lnT w="6350" cap="flat" cmpd="sng" algn="ctr">
-                      <a:solidFill>
-                        <a:srgbClr val="E5E0D8"/>
-                      </a:solidFill>
-                      <a:prstDash val="solid"/>
-                      <a:round/>
-                      <a:headEnd type="none" w="med" len="med"/>
-                      <a:tailEnd type="none" w="med" len="med"/>
-                    </a:lnT>
-                    <a:lnB w="6350" cap="flat" cmpd="sng" algn="ctr">
-                      <a:solidFill>
-                        <a:srgbClr val="E5E0D8"/>
-                      </a:solidFill>
-                      <a:prstDash val="solid"/>
-                      <a:round/>
-                      <a:headEnd type="none" w="med" len="med"/>
-                      <a:tailEnd type="none" w="med" len="med"/>
-                    </a:lnB>
-                  </a:tcPr>
-                </a:tc>
-              </a:tr>
-              <a:tr h="566928">
-                <a:tc>
-                  <a:txBody>
-                    <a:bodyPr/>
-                    <a:lstStyle/>
-                    <a:p>
-                      <a:pPr algn="l" indent="0" marL="0">
-                        <a:buNone/>
-                      </a:pPr>
-                      <a:r>
-                        <a:rPr lang="en-US" sz="1600" dirty="0">
+                        <a:rPr sz="1200" b="0">
                           <a:solidFill>
                             <a:srgbClr val="1A1A1E"/>
                           </a:solidFill>
-                          <a:latin typeface="Calibri" pitchFamily="34" charset="0"/>
-                          <a:ea typeface="Calibri" pitchFamily="34" charset="-122"/>
-                          <a:cs typeface="Calibri" pitchFamily="34" charset="-120"/>
+                          <a:latin typeface="Calibri"/>
                         </a:rPr>
-                        <a:t>Random Forest</a:t>
+                        <a:t>4.019</a:t>
                       </a:r>
-                      <a:endParaRPr lang="en-US" sz="1600" dirty="0">
-                        <a:latin typeface="Calibri" charset="0"/>
-                        <a:ea typeface="Calibri" charset="0"/>
-                        <a:cs typeface="Calibri" charset="0"/>
-                      </a:endParaRPr>
                     </a:p>
                   </a:txBody>
-                  <a:tcPr marL="91440" marR="91440" marT="45720" marB="45720" anchor="ctr">
-                    <a:lnL w="6350" cap="flat" cmpd="sng" algn="ctr">
-                      <a:solidFill>
-                        <a:srgbClr val="E5E0D8"/>
-                      </a:solidFill>
-                      <a:prstDash val="solid"/>
-                      <a:round/>
-                      <a:headEnd type="none" w="med" len="med"/>
-                      <a:tailEnd type="none" w="med" len="med"/>
-                    </a:lnL>
-                    <a:lnR w="6350" cap="flat" cmpd="sng" algn="ctr">
-                      <a:solidFill>
-                        <a:srgbClr val="E5E0D8"/>
-                      </a:solidFill>
-                      <a:prstDash val="solid"/>
-                      <a:round/>
-                      <a:headEnd type="none" w="med" len="med"/>
-                      <a:tailEnd type="none" w="med" len="med"/>
-                    </a:lnR>
-                    <a:lnT w="6350" cap="flat" cmpd="sng" algn="ctr">
-                      <a:solidFill>
-                        <a:srgbClr val="E5E0D8"/>
-                      </a:solidFill>
-                      <a:prstDash val="solid"/>
-                      <a:round/>
-                      <a:headEnd type="none" w="med" len="med"/>
-                      <a:tailEnd type="none" w="med" len="med"/>
-                    </a:lnT>
-                    <a:lnB w="6350" cap="flat" cmpd="sng" algn="ctr">
-                      <a:solidFill>
-                        <a:srgbClr val="E5E0D8"/>
-                      </a:solidFill>
-                      <a:prstDash val="solid"/>
-                      <a:round/>
-                      <a:headEnd type="none" w="med" len="med"/>
-                      <a:tailEnd type="none" w="med" len="med"/>
-                    </a:lnB>
+                  <a:tcPr anchor="ctr" marL="80000" marR="60000" marT="20000" marB="20000">
+                    <a:solidFill>
+                      <a:srgbClr val="F7F4EC"/>
+                    </a:solidFill>
                   </a:tcPr>
                 </a:tc>
                 <a:tc>
@@ -6851,64 +6334,22 @@
                     <a:bodyPr/>
                     <a:lstStyle/>
                     <a:p>
-                      <a:pPr algn="ctr" indent="0" marL="0">
-                        <a:buNone/>
-                      </a:pPr>
+                      <a:pPr algn="ctr"/>
                       <a:r>
-                        <a:rPr lang="en-US" sz="1600" dirty="0">
+                        <a:rPr sz="1200" b="0">
                           <a:solidFill>
                             <a:srgbClr val="1A1A1E"/>
                           </a:solidFill>
-                          <a:latin typeface="Calibri" pitchFamily="34" charset="0"/>
-                          <a:ea typeface="Calibri" pitchFamily="34" charset="-122"/>
-                          <a:cs typeface="Calibri" pitchFamily="34" charset="-120"/>
+                          <a:latin typeface="Calibri"/>
                         </a:rPr>
-                        <a:t>4.072</a:t>
+                        <a:t>3.007</a:t>
                       </a:r>
-                      <a:endParaRPr lang="en-US" sz="1600" dirty="0">
-                        <a:latin typeface="Calibri" charset="0"/>
-                        <a:ea typeface="Calibri" charset="0"/>
-                        <a:cs typeface="Calibri" charset="0"/>
-                      </a:endParaRPr>
                     </a:p>
                   </a:txBody>
-                  <a:tcPr marL="91440" marR="91440" marT="45720" marB="45720" anchor="ctr">
-                    <a:lnL w="6350" cap="flat" cmpd="sng" algn="ctr">
-                      <a:solidFill>
-                        <a:srgbClr val="E5E0D8"/>
-                      </a:solidFill>
-                      <a:prstDash val="solid"/>
-                      <a:round/>
-                      <a:headEnd type="none" w="med" len="med"/>
-                      <a:tailEnd type="none" w="med" len="med"/>
-                    </a:lnL>
-                    <a:lnR w="6350" cap="flat" cmpd="sng" algn="ctr">
-                      <a:solidFill>
-                        <a:srgbClr val="E5E0D8"/>
-                      </a:solidFill>
-                      <a:prstDash val="solid"/>
-                      <a:round/>
-                      <a:headEnd type="none" w="med" len="med"/>
-                      <a:tailEnd type="none" w="med" len="med"/>
-                    </a:lnR>
-                    <a:lnT w="6350" cap="flat" cmpd="sng" algn="ctr">
-                      <a:solidFill>
-                        <a:srgbClr val="E5E0D8"/>
-                      </a:solidFill>
-                      <a:prstDash val="solid"/>
-                      <a:round/>
-                      <a:headEnd type="none" w="med" len="med"/>
-                      <a:tailEnd type="none" w="med" len="med"/>
-                    </a:lnT>
-                    <a:lnB w="6350" cap="flat" cmpd="sng" algn="ctr">
-                      <a:solidFill>
-                        <a:srgbClr val="E5E0D8"/>
-                      </a:solidFill>
-                      <a:prstDash val="solid"/>
-                      <a:round/>
-                      <a:headEnd type="none" w="med" len="med"/>
-                      <a:tailEnd type="none" w="med" len="med"/>
-                    </a:lnB>
+                  <a:tcPr anchor="ctr" marL="80000" marR="60000" marT="20000" marB="20000">
+                    <a:solidFill>
+                      <a:srgbClr val="F7F4EC"/>
+                    </a:solidFill>
                   </a:tcPr>
                 </a:tc>
                 <a:tc>
@@ -6916,64 +6357,47 @@
                     <a:bodyPr/>
                     <a:lstStyle/>
                     <a:p>
-                      <a:pPr algn="ctr" indent="0" marL="0">
-                        <a:buNone/>
-                      </a:pPr>
+                      <a:pPr algn="ctr"/>
                       <a:r>
-                        <a:rPr lang="en-US" sz="1600" dirty="0">
+                        <a:rPr sz="1200" b="0">
                           <a:solidFill>
                             <a:srgbClr val="1A1A1E"/>
                           </a:solidFill>
-                          <a:latin typeface="Calibri" pitchFamily="34" charset="0"/>
-                          <a:ea typeface="Calibri" pitchFamily="34" charset="-122"/>
-                          <a:cs typeface="Calibri" pitchFamily="34" charset="-120"/>
+                          <a:latin typeface="Calibri"/>
                         </a:rPr>
-                        <a:t>4.019</a:t>
+                        <a:t>0.410</a:t>
                       </a:r>
-                      <a:endParaRPr lang="en-US" sz="1600" dirty="0">
-                        <a:latin typeface="Calibri" charset="0"/>
-                        <a:ea typeface="Calibri" charset="0"/>
-                        <a:cs typeface="Calibri" charset="0"/>
-                      </a:endParaRPr>
                     </a:p>
                   </a:txBody>
-                  <a:tcPr marL="91440" marR="91440" marT="45720" marB="45720" anchor="ctr">
-                    <a:lnL w="6350" cap="flat" cmpd="sng" algn="ctr">
-                      <a:solidFill>
-                        <a:srgbClr val="E5E0D8"/>
-                      </a:solidFill>
-                      <a:prstDash val="solid"/>
-                      <a:round/>
-                      <a:headEnd type="none" w="med" len="med"/>
-                      <a:tailEnd type="none" w="med" len="med"/>
-                    </a:lnL>
-                    <a:lnR w="6350" cap="flat" cmpd="sng" algn="ctr">
-                      <a:solidFill>
-                        <a:srgbClr val="E5E0D8"/>
-                      </a:solidFill>
-                      <a:prstDash val="solid"/>
-                      <a:round/>
-                      <a:headEnd type="none" w="med" len="med"/>
-                      <a:tailEnd type="none" w="med" len="med"/>
-                    </a:lnR>
-                    <a:lnT w="6350" cap="flat" cmpd="sng" algn="ctr">
-                      <a:solidFill>
-                        <a:srgbClr val="E5E0D8"/>
-                      </a:solidFill>
-                      <a:prstDash val="solid"/>
-                      <a:round/>
-                      <a:headEnd type="none" w="med" len="med"/>
-                      <a:tailEnd type="none" w="med" len="med"/>
-                    </a:lnT>
-                    <a:lnB w="6350" cap="flat" cmpd="sng" algn="ctr">
-                      <a:solidFill>
-                        <a:srgbClr val="E5E0D8"/>
-                      </a:solidFill>
-                      <a:prstDash val="solid"/>
-                      <a:round/>
-                      <a:headEnd type="none" w="med" len="med"/>
-                      <a:tailEnd type="none" w="med" len="med"/>
-                    </a:lnB>
+                  <a:tcPr anchor="ctr" marL="80000" marR="60000" marT="20000" marB="20000">
+                    <a:solidFill>
+                      <a:srgbClr val="F7F4EC"/>
+                    </a:solidFill>
+                  </a:tcPr>
+                </a:tc>
+              </a:tr>
+              <a:tr h="470000">
+                <a:tc>
+                  <a:txBody>
+                    <a:bodyPr/>
+                    <a:lstStyle/>
+                    <a:p>
+                      <a:pPr algn="l"/>
+                      <a:r>
+                        <a:rPr sz="1200" b="0">
+                          <a:solidFill>
+                            <a:srgbClr val="1A1A1E"/>
+                          </a:solidFill>
+                          <a:latin typeface="Calibri"/>
+                        </a:rPr>
+                        <a:t>XGBoost</a:t>
+                      </a:r>
+                    </a:p>
+                  </a:txBody>
+                  <a:tcPr anchor="ctr" marL="80000" marR="60000" marT="20000" marB="20000">
+                    <a:solidFill>
+                      <a:srgbClr val="FFFFFF"/>
+                    </a:solidFill>
                   </a:tcPr>
                 </a:tc>
                 <a:tc>
@@ -6981,64 +6405,22 @@
                     <a:bodyPr/>
                     <a:lstStyle/>
                     <a:p>
-                      <a:pPr algn="ctr" indent="0" marL="0">
-                        <a:buNone/>
-                      </a:pPr>
+                      <a:pPr algn="ctr"/>
                       <a:r>
-                        <a:rPr lang="en-US" sz="1600" dirty="0">
+                        <a:rPr sz="1200" b="0">
                           <a:solidFill>
                             <a:srgbClr val="1A1A1E"/>
                           </a:solidFill>
-                          <a:latin typeface="Calibri" pitchFamily="34" charset="0"/>
-                          <a:ea typeface="Calibri" pitchFamily="34" charset="-122"/>
-                          <a:cs typeface="Calibri" pitchFamily="34" charset="-120"/>
+                          <a:latin typeface="Calibri"/>
                         </a:rPr>
-                        <a:t>3.007</a:t>
+                        <a:t>3.867</a:t>
                       </a:r>
-                      <a:endParaRPr lang="en-US" sz="1600" dirty="0">
-                        <a:latin typeface="Calibri" charset="0"/>
-                        <a:ea typeface="Calibri" charset="0"/>
-                        <a:cs typeface="Calibri" charset="0"/>
-                      </a:endParaRPr>
                     </a:p>
                   </a:txBody>
-                  <a:tcPr marL="91440" marR="91440" marT="45720" marB="45720" anchor="ctr">
-                    <a:lnL w="6350" cap="flat" cmpd="sng" algn="ctr">
-                      <a:solidFill>
-                        <a:srgbClr val="E5E0D8"/>
-                      </a:solidFill>
-                      <a:prstDash val="solid"/>
-                      <a:round/>
-                      <a:headEnd type="none" w="med" len="med"/>
-                      <a:tailEnd type="none" w="med" len="med"/>
-                    </a:lnL>
-                    <a:lnR w="6350" cap="flat" cmpd="sng" algn="ctr">
-                      <a:solidFill>
-                        <a:srgbClr val="E5E0D8"/>
-                      </a:solidFill>
-                      <a:prstDash val="solid"/>
-                      <a:round/>
-                      <a:headEnd type="none" w="med" len="med"/>
-                      <a:tailEnd type="none" w="med" len="med"/>
-                    </a:lnR>
-                    <a:lnT w="6350" cap="flat" cmpd="sng" algn="ctr">
-                      <a:solidFill>
-                        <a:srgbClr val="E5E0D8"/>
-                      </a:solidFill>
-                      <a:prstDash val="solid"/>
-                      <a:round/>
-                      <a:headEnd type="none" w="med" len="med"/>
-                      <a:tailEnd type="none" w="med" len="med"/>
-                    </a:lnT>
-                    <a:lnB w="6350" cap="flat" cmpd="sng" algn="ctr">
-                      <a:solidFill>
-                        <a:srgbClr val="E5E0D8"/>
-                      </a:solidFill>
-                      <a:prstDash val="solid"/>
-                      <a:round/>
-                      <a:headEnd type="none" w="med" len="med"/>
-                      <a:tailEnd type="none" w="med" len="med"/>
-                    </a:lnB>
+                  <a:tcPr anchor="ctr" marL="80000" marR="60000" marT="20000" marB="20000">
+                    <a:solidFill>
+                      <a:srgbClr val="FFFFFF"/>
+                    </a:solidFill>
                   </a:tcPr>
                 </a:tc>
                 <a:tc>
@@ -7046,64 +6428,22 @@
                     <a:bodyPr/>
                     <a:lstStyle/>
                     <a:p>
-                      <a:pPr algn="ctr" indent="0" marL="0">
-                        <a:buNone/>
-                      </a:pPr>
+                      <a:pPr algn="ctr"/>
                       <a:r>
-                        <a:rPr lang="en-US" sz="1600" dirty="0">
+                        <a:rPr sz="1200" b="0">
                           <a:solidFill>
-                            <a:srgbClr val="1A1A1E"/>
+                            <a:srgbClr val="6E6A5C"/>
                           </a:solidFill>
-                          <a:latin typeface="Calibri" pitchFamily="34" charset="0"/>
-                          <a:ea typeface="Calibri" pitchFamily="34" charset="-122"/>
-                          <a:cs typeface="Calibri" pitchFamily="34" charset="-120"/>
+                          <a:latin typeface="Calibri"/>
                         </a:rPr>
-                        <a:t>0.410</a:t>
+                        <a:t>—</a:t>
                       </a:r>
-                      <a:endParaRPr lang="en-US" sz="1600" dirty="0">
-                        <a:latin typeface="Calibri" charset="0"/>
-                        <a:ea typeface="Calibri" charset="0"/>
-                        <a:cs typeface="Calibri" charset="0"/>
-                      </a:endParaRPr>
                     </a:p>
                   </a:txBody>
-                  <a:tcPr marL="91440" marR="91440" marT="45720" marB="45720" anchor="ctr">
-                    <a:lnL w="6350" cap="flat" cmpd="sng" algn="ctr">
-                      <a:solidFill>
-                        <a:srgbClr val="E5E0D8"/>
-                      </a:solidFill>
-                      <a:prstDash val="solid"/>
-                      <a:round/>
-                      <a:headEnd type="none" w="med" len="med"/>
-                      <a:tailEnd type="none" w="med" len="med"/>
-                    </a:lnL>
-                    <a:lnR w="6350" cap="flat" cmpd="sng" algn="ctr">
-                      <a:solidFill>
-                        <a:srgbClr val="E5E0D8"/>
-                      </a:solidFill>
-                      <a:prstDash val="solid"/>
-                      <a:round/>
-                      <a:headEnd type="none" w="med" len="med"/>
-                      <a:tailEnd type="none" w="med" len="med"/>
-                    </a:lnR>
-                    <a:lnT w="6350" cap="flat" cmpd="sng" algn="ctr">
-                      <a:solidFill>
-                        <a:srgbClr val="E5E0D8"/>
-                      </a:solidFill>
-                      <a:prstDash val="solid"/>
-                      <a:round/>
-                      <a:headEnd type="none" w="med" len="med"/>
-                      <a:tailEnd type="none" w="med" len="med"/>
-                    </a:lnT>
-                    <a:lnB w="6350" cap="flat" cmpd="sng" algn="ctr">
-                      <a:solidFill>
-                        <a:srgbClr val="E5E0D8"/>
-                      </a:solidFill>
-                      <a:prstDash val="solid"/>
-                      <a:round/>
-                      <a:headEnd type="none" w="med" len="med"/>
-                      <a:tailEnd type="none" w="med" len="med"/>
-                    </a:lnB>
+                  <a:tcPr anchor="ctr" marL="80000" marR="60000" marT="20000" marB="20000">
+                    <a:solidFill>
+                      <a:srgbClr val="FFFFFF"/>
+                    </a:solidFill>
                   </a:tcPr>
                 </a:tc>
                 <a:tc>
@@ -7111,131 +6451,22 @@
                     <a:bodyPr/>
                     <a:lstStyle/>
                     <a:p>
-                      <a:pPr algn="l" indent="0" marL="0">
-                        <a:buNone/>
-                      </a:pPr>
+                      <a:pPr algn="ctr"/>
                       <a:r>
-                        <a:rPr lang="en-US" sz="1600" dirty="0">
-                          <a:solidFill>
-                            <a:srgbClr val="6F6F6F"/>
-                          </a:solidFill>
-                          <a:latin typeface="Calibri" pitchFamily="34" charset="0"/>
-                          <a:ea typeface="Calibri" pitchFamily="34" charset="-122"/>
-                          <a:cs typeface="Calibri" pitchFamily="34" charset="-120"/>
-                        </a:rPr>
-                        <a:t>Bagged trees; slight overfit</a:t>
-                      </a:r>
-                      <a:endParaRPr lang="en-US" sz="1600" dirty="0">
-                        <a:latin typeface="Calibri" charset="0"/>
-                        <a:ea typeface="Calibri" charset="0"/>
-                        <a:cs typeface="Calibri" charset="0"/>
-                      </a:endParaRPr>
-                    </a:p>
-                  </a:txBody>
-                  <a:tcPr marL="91440" marR="91440" marT="45720" marB="45720" anchor="ctr">
-                    <a:lnL w="6350" cap="flat" cmpd="sng" algn="ctr">
-                      <a:solidFill>
-                        <a:srgbClr val="E5E0D8"/>
-                      </a:solidFill>
-                      <a:prstDash val="solid"/>
-                      <a:round/>
-                      <a:headEnd type="none" w="med" len="med"/>
-                      <a:tailEnd type="none" w="med" len="med"/>
-                    </a:lnL>
-                    <a:lnR w="6350" cap="flat" cmpd="sng" algn="ctr">
-                      <a:solidFill>
-                        <a:srgbClr val="E5E0D8"/>
-                      </a:solidFill>
-                      <a:prstDash val="solid"/>
-                      <a:round/>
-                      <a:headEnd type="none" w="med" len="med"/>
-                      <a:tailEnd type="none" w="med" len="med"/>
-                    </a:lnR>
-                    <a:lnT w="6350" cap="flat" cmpd="sng" algn="ctr">
-                      <a:solidFill>
-                        <a:srgbClr val="E5E0D8"/>
-                      </a:solidFill>
-                      <a:prstDash val="solid"/>
-                      <a:round/>
-                      <a:headEnd type="none" w="med" len="med"/>
-                      <a:tailEnd type="none" w="med" len="med"/>
-                    </a:lnT>
-                    <a:lnB w="6350" cap="flat" cmpd="sng" algn="ctr">
-                      <a:solidFill>
-                        <a:srgbClr val="E5E0D8"/>
-                      </a:solidFill>
-                      <a:prstDash val="solid"/>
-                      <a:round/>
-                      <a:headEnd type="none" w="med" len="med"/>
-                      <a:tailEnd type="none" w="med" len="med"/>
-                    </a:lnB>
-                  </a:tcPr>
-                </a:tc>
-              </a:tr>
-              <a:tr h="566928">
-                <a:tc>
-                  <a:txBody>
-                    <a:bodyPr/>
-                    <a:lstStyle/>
-                    <a:p>
-                      <a:pPr algn="l" indent="0" marL="0">
-                        <a:buNone/>
-                      </a:pPr>
-                      <a:r>
-                        <a:rPr lang="en-US" sz="1600" dirty="0">
+                        <a:rPr sz="1200" b="0">
                           <a:solidFill>
                             <a:srgbClr val="1A1A1E"/>
                           </a:solidFill>
-                          <a:latin typeface="Calibri" pitchFamily="34" charset="0"/>
-                          <a:ea typeface="Calibri" pitchFamily="34" charset="-122"/>
-                          <a:cs typeface="Calibri" pitchFamily="34" charset="-120"/>
+                          <a:latin typeface="Calibri"/>
                         </a:rPr>
-                        <a:t>[ 5th model ]</a:t>
+                        <a:t>2.955</a:t>
                       </a:r>
-                      <a:endParaRPr lang="en-US" sz="1600" dirty="0">
-                        <a:latin typeface="Calibri" charset="0"/>
-                        <a:ea typeface="Calibri" charset="0"/>
-                        <a:cs typeface="Calibri" charset="0"/>
-                      </a:endParaRPr>
                     </a:p>
                   </a:txBody>
-                  <a:tcPr marL="91440" marR="91440" marT="45720" marB="45720" anchor="ctr">
-                    <a:lnL w="6350" cap="flat" cmpd="sng" algn="ctr">
-                      <a:solidFill>
-                        <a:srgbClr val="E5E0D8"/>
-                      </a:solidFill>
-                      <a:prstDash val="solid"/>
-                      <a:round/>
-                      <a:headEnd type="none" w="med" len="med"/>
-                      <a:tailEnd type="none" w="med" len="med"/>
-                    </a:lnL>
-                    <a:lnR w="6350" cap="flat" cmpd="sng" algn="ctr">
-                      <a:solidFill>
-                        <a:srgbClr val="E5E0D8"/>
-                      </a:solidFill>
-                      <a:prstDash val="solid"/>
-                      <a:round/>
-                      <a:headEnd type="none" w="med" len="med"/>
-                      <a:tailEnd type="none" w="med" len="med"/>
-                    </a:lnR>
-                    <a:lnT w="6350" cap="flat" cmpd="sng" algn="ctr">
-                      <a:solidFill>
-                        <a:srgbClr val="E5E0D8"/>
-                      </a:solidFill>
-                      <a:prstDash val="solid"/>
-                      <a:round/>
-                      <a:headEnd type="none" w="med" len="med"/>
-                      <a:tailEnd type="none" w="med" len="med"/>
-                    </a:lnT>
-                    <a:lnB w="6350" cap="flat" cmpd="sng" algn="ctr">
-                      <a:solidFill>
-                        <a:srgbClr val="E5E0D8"/>
-                      </a:solidFill>
-                      <a:prstDash val="solid"/>
-                      <a:round/>
-                      <a:headEnd type="none" w="med" len="med"/>
-                      <a:tailEnd type="none" w="med" len="med"/>
-                    </a:lnB>
+                  <a:tcPr anchor="ctr" marL="80000" marR="60000" marT="20000" marB="20000">
+                    <a:solidFill>
+                      <a:srgbClr val="FFFFFF"/>
+                    </a:solidFill>
                   </a:tcPr>
                 </a:tc>
                 <a:tc>
@@ -7243,64 +6474,47 @@
                     <a:bodyPr/>
                     <a:lstStyle/>
                     <a:p>
-                      <a:pPr algn="ctr" indent="0" marL="0">
-                        <a:buNone/>
-                      </a:pPr>
+                      <a:pPr algn="ctr"/>
                       <a:r>
-                        <a:rPr lang="en-US" sz="1600" dirty="0">
+                        <a:rPr sz="1200" b="0">
+                          <a:solidFill>
+                            <a:srgbClr val="6E6A5C"/>
+                          </a:solidFill>
+                          <a:latin typeface="Calibri"/>
+                        </a:rPr>
+                        <a:t>—</a:t>
+                      </a:r>
+                    </a:p>
+                  </a:txBody>
+                  <a:tcPr anchor="ctr" marL="80000" marR="60000" marT="20000" marB="20000">
+                    <a:solidFill>
+                      <a:srgbClr val="FFFFFF"/>
+                    </a:solidFill>
+                  </a:tcPr>
+                </a:tc>
+              </a:tr>
+              <a:tr h="470000">
+                <a:tc>
+                  <a:txBody>
+                    <a:bodyPr/>
+                    <a:lstStyle/>
+                    <a:p>
+                      <a:pPr algn="l"/>
+                      <a:r>
+                        <a:rPr sz="1200" b="0">
                           <a:solidFill>
                             <a:srgbClr val="1A1A1E"/>
                           </a:solidFill>
-                          <a:latin typeface="Calibri" pitchFamily="34" charset="0"/>
-                          <a:ea typeface="Calibri" pitchFamily="34" charset="-122"/>
-                          <a:cs typeface="Calibri" pitchFamily="34" charset="-120"/>
+                          <a:latin typeface="Calibri"/>
                         </a:rPr>
-                        <a:t>—</a:t>
+                        <a:t>Neural Net (MLP)</a:t>
                       </a:r>
-                      <a:endParaRPr lang="en-US" sz="1600" dirty="0">
-                        <a:latin typeface="Calibri" charset="0"/>
-                        <a:ea typeface="Calibri" charset="0"/>
-                        <a:cs typeface="Calibri" charset="0"/>
-                      </a:endParaRPr>
                     </a:p>
                   </a:txBody>
-                  <a:tcPr marL="91440" marR="91440" marT="45720" marB="45720" anchor="ctr">
-                    <a:lnL w="6350" cap="flat" cmpd="sng" algn="ctr">
-                      <a:solidFill>
-                        <a:srgbClr val="E5E0D8"/>
-                      </a:solidFill>
-                      <a:prstDash val="solid"/>
-                      <a:round/>
-                      <a:headEnd type="none" w="med" len="med"/>
-                      <a:tailEnd type="none" w="med" len="med"/>
-                    </a:lnL>
-                    <a:lnR w="6350" cap="flat" cmpd="sng" algn="ctr">
-                      <a:solidFill>
-                        <a:srgbClr val="E5E0D8"/>
-                      </a:solidFill>
-                      <a:prstDash val="solid"/>
-                      <a:round/>
-                      <a:headEnd type="none" w="med" len="med"/>
-                      <a:tailEnd type="none" w="med" len="med"/>
-                    </a:lnR>
-                    <a:lnT w="6350" cap="flat" cmpd="sng" algn="ctr">
-                      <a:solidFill>
-                        <a:srgbClr val="E5E0D8"/>
-                      </a:solidFill>
-                      <a:prstDash val="solid"/>
-                      <a:round/>
-                      <a:headEnd type="none" w="med" len="med"/>
-                      <a:tailEnd type="none" w="med" len="med"/>
-                    </a:lnT>
-                    <a:lnB w="6350" cap="flat" cmpd="sng" algn="ctr">
-                      <a:solidFill>
-                        <a:srgbClr val="E5E0D8"/>
-                      </a:solidFill>
-                      <a:prstDash val="solid"/>
-                      <a:round/>
-                      <a:headEnd type="none" w="med" len="med"/>
-                      <a:tailEnd type="none" w="med" len="med"/>
-                    </a:lnB>
+                  <a:tcPr anchor="ctr" marL="80000" marR="60000" marT="20000" marB="20000">
+                    <a:solidFill>
+                      <a:srgbClr val="F7F4EC"/>
+                    </a:solidFill>
                   </a:tcPr>
                 </a:tc>
                 <a:tc>
@@ -7308,64 +6522,22 @@
                     <a:bodyPr/>
                     <a:lstStyle/>
                     <a:p>
-                      <a:pPr algn="ctr" indent="0" marL="0">
-                        <a:buNone/>
-                      </a:pPr>
+                      <a:pPr algn="ctr"/>
                       <a:r>
-                        <a:rPr lang="en-US" sz="1600" dirty="0">
+                        <a:rPr sz="1200" b="0">
                           <a:solidFill>
                             <a:srgbClr val="1A1A1E"/>
                           </a:solidFill>
-                          <a:latin typeface="Calibri" pitchFamily="34" charset="0"/>
-                          <a:ea typeface="Calibri" pitchFamily="34" charset="-122"/>
-                          <a:cs typeface="Calibri" pitchFamily="34" charset="-120"/>
+                          <a:latin typeface="Calibri"/>
                         </a:rPr>
-                        <a:t>—</a:t>
+                        <a:t>5.101</a:t>
                       </a:r>
-                      <a:endParaRPr lang="en-US" sz="1600" dirty="0">
-                        <a:latin typeface="Calibri" charset="0"/>
-                        <a:ea typeface="Calibri" charset="0"/>
-                        <a:cs typeface="Calibri" charset="0"/>
-                      </a:endParaRPr>
                     </a:p>
                   </a:txBody>
-                  <a:tcPr marL="91440" marR="91440" marT="45720" marB="45720" anchor="ctr">
-                    <a:lnL w="6350" cap="flat" cmpd="sng" algn="ctr">
-                      <a:solidFill>
-                        <a:srgbClr val="E5E0D8"/>
-                      </a:solidFill>
-                      <a:prstDash val="solid"/>
-                      <a:round/>
-                      <a:headEnd type="none" w="med" len="med"/>
-                      <a:tailEnd type="none" w="med" len="med"/>
-                    </a:lnL>
-                    <a:lnR w="6350" cap="flat" cmpd="sng" algn="ctr">
-                      <a:solidFill>
-                        <a:srgbClr val="E5E0D8"/>
-                      </a:solidFill>
-                      <a:prstDash val="solid"/>
-                      <a:round/>
-                      <a:headEnd type="none" w="med" len="med"/>
-                      <a:tailEnd type="none" w="med" len="med"/>
-                    </a:lnR>
-                    <a:lnT w="6350" cap="flat" cmpd="sng" algn="ctr">
-                      <a:solidFill>
-                        <a:srgbClr val="E5E0D8"/>
-                      </a:solidFill>
-                      <a:prstDash val="solid"/>
-                      <a:round/>
-                      <a:headEnd type="none" w="med" len="med"/>
-                      <a:tailEnd type="none" w="med" len="med"/>
-                    </a:lnT>
-                    <a:lnB w="6350" cap="flat" cmpd="sng" algn="ctr">
-                      <a:solidFill>
-                        <a:srgbClr val="E5E0D8"/>
-                      </a:solidFill>
-                      <a:prstDash val="solid"/>
-                      <a:round/>
-                      <a:headEnd type="none" w="med" len="med"/>
-                      <a:tailEnd type="none" w="med" len="med"/>
-                    </a:lnB>
+                  <a:tcPr anchor="ctr" marL="80000" marR="60000" marT="20000" marB="20000">
+                    <a:solidFill>
+                      <a:srgbClr val="F7F4EC"/>
+                    </a:solidFill>
                   </a:tcPr>
                 </a:tc>
                 <a:tc>
@@ -7373,64 +6545,22 @@
                     <a:bodyPr/>
                     <a:lstStyle/>
                     <a:p>
-                      <a:pPr algn="ctr" indent="0" marL="0">
-                        <a:buNone/>
-                      </a:pPr>
+                      <a:pPr algn="ctr"/>
                       <a:r>
-                        <a:rPr lang="en-US" sz="1600" dirty="0">
+                        <a:rPr sz="1200" b="0">
                           <a:solidFill>
-                            <a:srgbClr val="1A1A1E"/>
+                            <a:srgbClr val="6E6A5C"/>
                           </a:solidFill>
-                          <a:latin typeface="Calibri" pitchFamily="34" charset="0"/>
-                          <a:ea typeface="Calibri" pitchFamily="34" charset="-122"/>
-                          <a:cs typeface="Calibri" pitchFamily="34" charset="-120"/>
+                          <a:latin typeface="Calibri"/>
                         </a:rPr>
                         <a:t>—</a:t>
                       </a:r>
-                      <a:endParaRPr lang="en-US" sz="1600" dirty="0">
-                        <a:latin typeface="Calibri" charset="0"/>
-                        <a:ea typeface="Calibri" charset="0"/>
-                        <a:cs typeface="Calibri" charset="0"/>
-                      </a:endParaRPr>
                     </a:p>
                   </a:txBody>
-                  <a:tcPr marL="91440" marR="91440" marT="45720" marB="45720" anchor="ctr">
-                    <a:lnL w="6350" cap="flat" cmpd="sng" algn="ctr">
-                      <a:solidFill>
-                        <a:srgbClr val="E5E0D8"/>
-                      </a:solidFill>
-                      <a:prstDash val="solid"/>
-                      <a:round/>
-                      <a:headEnd type="none" w="med" len="med"/>
-                      <a:tailEnd type="none" w="med" len="med"/>
-                    </a:lnL>
-                    <a:lnR w="6350" cap="flat" cmpd="sng" algn="ctr">
-                      <a:solidFill>
-                        <a:srgbClr val="E5E0D8"/>
-                      </a:solidFill>
-                      <a:prstDash val="solid"/>
-                      <a:round/>
-                      <a:headEnd type="none" w="med" len="med"/>
-                      <a:tailEnd type="none" w="med" len="med"/>
-                    </a:lnR>
-                    <a:lnT w="6350" cap="flat" cmpd="sng" algn="ctr">
-                      <a:solidFill>
-                        <a:srgbClr val="E5E0D8"/>
-                      </a:solidFill>
-                      <a:prstDash val="solid"/>
-                      <a:round/>
-                      <a:headEnd type="none" w="med" len="med"/>
-                      <a:tailEnd type="none" w="med" len="med"/>
-                    </a:lnT>
-                    <a:lnB w="6350" cap="flat" cmpd="sng" algn="ctr">
-                      <a:solidFill>
-                        <a:srgbClr val="E5E0D8"/>
-                      </a:solidFill>
-                      <a:prstDash val="solid"/>
-                      <a:round/>
-                      <a:headEnd type="none" w="med" len="med"/>
-                      <a:tailEnd type="none" w="med" len="med"/>
-                    </a:lnB>
+                  <a:tcPr anchor="ctr" marL="80000" marR="60000" marT="20000" marB="20000">
+                    <a:solidFill>
+                      <a:srgbClr val="F7F4EC"/>
+                    </a:solidFill>
                   </a:tcPr>
                 </a:tc>
                 <a:tc>
@@ -7438,64 +6568,22 @@
                     <a:bodyPr/>
                     <a:lstStyle/>
                     <a:p>
-                      <a:pPr algn="ctr" indent="0" marL="0">
-                        <a:buNone/>
-                      </a:pPr>
+                      <a:pPr algn="ctr"/>
                       <a:r>
-                        <a:rPr lang="en-US" sz="1600" dirty="0">
+                        <a:rPr sz="1200" b="0">
                           <a:solidFill>
-                            <a:srgbClr val="1A1A1E"/>
+                            <a:srgbClr val="6E6A5C"/>
                           </a:solidFill>
-                          <a:latin typeface="Calibri" pitchFamily="34" charset="0"/>
-                          <a:ea typeface="Calibri" pitchFamily="34" charset="-122"/>
-                          <a:cs typeface="Calibri" pitchFamily="34" charset="-120"/>
+                          <a:latin typeface="Calibri"/>
                         </a:rPr>
                         <a:t>—</a:t>
                       </a:r>
-                      <a:endParaRPr lang="en-US" sz="1600" dirty="0">
-                        <a:latin typeface="Calibri" charset="0"/>
-                        <a:ea typeface="Calibri" charset="0"/>
-                        <a:cs typeface="Calibri" charset="0"/>
-                      </a:endParaRPr>
                     </a:p>
                   </a:txBody>
-                  <a:tcPr marL="91440" marR="91440" marT="45720" marB="45720" anchor="ctr">
-                    <a:lnL w="6350" cap="flat" cmpd="sng" algn="ctr">
-                      <a:solidFill>
-                        <a:srgbClr val="E5E0D8"/>
-                      </a:solidFill>
-                      <a:prstDash val="solid"/>
-                      <a:round/>
-                      <a:headEnd type="none" w="med" len="med"/>
-                      <a:tailEnd type="none" w="med" len="med"/>
-                    </a:lnL>
-                    <a:lnR w="6350" cap="flat" cmpd="sng" algn="ctr">
-                      <a:solidFill>
-                        <a:srgbClr val="E5E0D8"/>
-                      </a:solidFill>
-                      <a:prstDash val="solid"/>
-                      <a:round/>
-                      <a:headEnd type="none" w="med" len="med"/>
-                      <a:tailEnd type="none" w="med" len="med"/>
-                    </a:lnR>
-                    <a:lnT w="6350" cap="flat" cmpd="sng" algn="ctr">
-                      <a:solidFill>
-                        <a:srgbClr val="E5E0D8"/>
-                      </a:solidFill>
-                      <a:prstDash val="solid"/>
-                      <a:round/>
-                      <a:headEnd type="none" w="med" len="med"/>
-                      <a:tailEnd type="none" w="med" len="med"/>
-                    </a:lnT>
-                    <a:lnB w="6350" cap="flat" cmpd="sng" algn="ctr">
-                      <a:solidFill>
-                        <a:srgbClr val="E5E0D8"/>
-                      </a:solidFill>
-                      <a:prstDash val="solid"/>
-                      <a:round/>
-                      <a:headEnd type="none" w="med" len="med"/>
-                      <a:tailEnd type="none" w="med" len="med"/>
-                    </a:lnB>
+                  <a:tcPr anchor="ctr" marL="80000" marR="60000" marT="20000" marB="20000">
+                    <a:solidFill>
+                      <a:srgbClr val="F7F4EC"/>
+                    </a:solidFill>
                   </a:tcPr>
                 </a:tc>
                 <a:tc>
@@ -7503,523 +6591,44 @@
                     <a:bodyPr/>
                     <a:lstStyle/>
                     <a:p>
-                      <a:pPr algn="l" indent="0" marL="0">
-                        <a:buNone/>
-                      </a:pPr>
+                      <a:pPr algn="ctr"/>
                       <a:r>
-                        <a:rPr lang="en-US" sz="1600" dirty="0">
+                        <a:rPr sz="1200" b="0">
                           <a:solidFill>
-                            <a:srgbClr val="6F6F6F"/>
+                            <a:srgbClr val="1A1A1E"/>
                           </a:solidFill>
-                          <a:latin typeface="Calibri" pitchFamily="34" charset="0"/>
-                          <a:ea typeface="Calibri" pitchFamily="34" charset="-122"/>
-                          <a:cs typeface="Calibri" pitchFamily="34" charset="-120"/>
+                          <a:latin typeface="Calibri"/>
                         </a:rPr>
-                        <a:t>—</a:t>
+                        <a:t>0.06</a:t>
                       </a:r>
-                      <a:endParaRPr lang="en-US" sz="1600" dirty="0">
-                        <a:latin typeface="Calibri" charset="0"/>
-                        <a:ea typeface="Calibri" charset="0"/>
-                        <a:cs typeface="Calibri" charset="0"/>
-                      </a:endParaRPr>
                     </a:p>
                   </a:txBody>
-                  <a:tcPr marL="91440" marR="91440" marT="45720" marB="45720" anchor="ctr">
-                    <a:lnL w="6350" cap="flat" cmpd="sng" algn="ctr">
-                      <a:solidFill>
-                        <a:srgbClr val="E5E0D8"/>
-                      </a:solidFill>
-                      <a:prstDash val="solid"/>
-                      <a:round/>
-                      <a:headEnd type="none" w="med" len="med"/>
-                      <a:tailEnd type="none" w="med" len="med"/>
-                    </a:lnL>
-                    <a:lnR w="6350" cap="flat" cmpd="sng" algn="ctr">
-                      <a:solidFill>
-                        <a:srgbClr val="E5E0D8"/>
-                      </a:solidFill>
-                      <a:prstDash val="solid"/>
-                      <a:round/>
-                      <a:headEnd type="none" w="med" len="med"/>
-                      <a:tailEnd type="none" w="med" len="med"/>
-                    </a:lnR>
-                    <a:lnT w="6350" cap="flat" cmpd="sng" algn="ctr">
-                      <a:solidFill>
-                        <a:srgbClr val="E5E0D8"/>
-                      </a:solidFill>
-                      <a:prstDash val="solid"/>
-                      <a:round/>
-                      <a:headEnd type="none" w="med" len="med"/>
-                      <a:tailEnd type="none" w="med" len="med"/>
-                    </a:lnT>
-                    <a:lnB w="6350" cap="flat" cmpd="sng" algn="ctr">
-                      <a:solidFill>
-                        <a:srgbClr val="E5E0D8"/>
-                      </a:solidFill>
-                      <a:prstDash val="solid"/>
-                      <a:round/>
-                      <a:headEnd type="none" w="med" len="med"/>
-                      <a:tailEnd type="none" w="med" len="med"/>
-                    </a:lnB>
+                  <a:tcPr anchor="ctr" marL="80000" marR="60000" marT="20000" marB="20000">
+                    <a:solidFill>
+                      <a:srgbClr val="F7F4EC"/>
+                    </a:solidFill>
                   </a:tcPr>
                 </a:tc>
               </a:tr>
-              <a:tr h="566928">
+              <a:tr h="470000">
                 <a:tc>
                   <a:txBody>
                     <a:bodyPr/>
                     <a:lstStyle/>
                     <a:p>
-                      <a:pPr algn="l" indent="0" marL="0">
-                        <a:buNone/>
-                      </a:pPr>
+                      <a:pPr algn="l"/>
                       <a:r>
-                        <a:rPr lang="en-US" sz="1600" dirty="0">
+                        <a:rPr sz="1200" b="1">
                           <a:solidFill>
                             <a:srgbClr val="1A1A1E"/>
                           </a:solidFill>
-                          <a:latin typeface="Calibri" pitchFamily="34" charset="0"/>
-                          <a:ea typeface="Calibri" pitchFamily="34" charset="-122"/>
-                          <a:cs typeface="Calibri" pitchFamily="34" charset="-120"/>
+                          <a:latin typeface="Calibri"/>
                         </a:rPr>
-                        <a:t>Neural Net (MLP)</a:t>
+                        <a:t>CatBoost (final)</a:t>
                       </a:r>
-                      <a:endParaRPr lang="en-US" sz="1600" dirty="0">
-                        <a:latin typeface="Calibri" charset="0"/>
-                        <a:ea typeface="Calibri" charset="0"/>
-                        <a:cs typeface="Calibri" charset="0"/>
-                      </a:endParaRPr>
                     </a:p>
                   </a:txBody>
-                  <a:tcPr marL="91440" marR="91440" marT="45720" marB="45720" anchor="ctr">
-                    <a:lnL w="6350" cap="flat" cmpd="sng" algn="ctr">
-                      <a:solidFill>
-                        <a:srgbClr val="E5E0D8"/>
-                      </a:solidFill>
-                      <a:prstDash val="solid"/>
-                      <a:round/>
-                      <a:headEnd type="none" w="med" len="med"/>
-                      <a:tailEnd type="none" w="med" len="med"/>
-                    </a:lnL>
-                    <a:lnR w="6350" cap="flat" cmpd="sng" algn="ctr">
-                      <a:solidFill>
-                        <a:srgbClr val="E5E0D8"/>
-                      </a:solidFill>
-                      <a:prstDash val="solid"/>
-                      <a:round/>
-                      <a:headEnd type="none" w="med" len="med"/>
-                      <a:tailEnd type="none" w="med" len="med"/>
-                    </a:lnR>
-                    <a:lnT w="6350" cap="flat" cmpd="sng" algn="ctr">
-                      <a:solidFill>
-                        <a:srgbClr val="E5E0D8"/>
-                      </a:solidFill>
-                      <a:prstDash val="solid"/>
-                      <a:round/>
-                      <a:headEnd type="none" w="med" len="med"/>
-                      <a:tailEnd type="none" w="med" len="med"/>
-                    </a:lnT>
-                    <a:lnB w="6350" cap="flat" cmpd="sng" algn="ctr">
-                      <a:solidFill>
-                        <a:srgbClr val="E5E0D8"/>
-                      </a:solidFill>
-                      <a:prstDash val="solid"/>
-                      <a:round/>
-                      <a:headEnd type="none" w="med" len="med"/>
-                      <a:tailEnd type="none" w="med" len="med"/>
-                    </a:lnB>
-                  </a:tcPr>
-                </a:tc>
-                <a:tc>
-                  <a:txBody>
-                    <a:bodyPr/>
-                    <a:lstStyle/>
-                    <a:p>
-                      <a:pPr algn="ctr" indent="0" marL="0">
-                        <a:buNone/>
-                      </a:pPr>
-                      <a:r>
-                        <a:rPr lang="en-US" sz="1600" dirty="0">
-                          <a:solidFill>
-                            <a:srgbClr val="1A1A1E"/>
-                          </a:solidFill>
-                          <a:latin typeface="Calibri" pitchFamily="34" charset="0"/>
-                          <a:ea typeface="Calibri" pitchFamily="34" charset="-122"/>
-                          <a:cs typeface="Calibri" pitchFamily="34" charset="-120"/>
-                        </a:rPr>
-                        <a:t>5.101</a:t>
-                      </a:r>
-                      <a:endParaRPr lang="en-US" sz="1600" dirty="0">
-                        <a:latin typeface="Calibri" charset="0"/>
-                        <a:ea typeface="Calibri" charset="0"/>
-                        <a:cs typeface="Calibri" charset="0"/>
-                      </a:endParaRPr>
-                    </a:p>
-                  </a:txBody>
-                  <a:tcPr marL="91440" marR="91440" marT="45720" marB="45720" anchor="ctr">
-                    <a:lnL w="6350" cap="flat" cmpd="sng" algn="ctr">
-                      <a:solidFill>
-                        <a:srgbClr val="E5E0D8"/>
-                      </a:solidFill>
-                      <a:prstDash val="solid"/>
-                      <a:round/>
-                      <a:headEnd type="none" w="med" len="med"/>
-                      <a:tailEnd type="none" w="med" len="med"/>
-                    </a:lnL>
-                    <a:lnR w="6350" cap="flat" cmpd="sng" algn="ctr">
-                      <a:solidFill>
-                        <a:srgbClr val="E5E0D8"/>
-                      </a:solidFill>
-                      <a:prstDash val="solid"/>
-                      <a:round/>
-                      <a:headEnd type="none" w="med" len="med"/>
-                      <a:tailEnd type="none" w="med" len="med"/>
-                    </a:lnR>
-                    <a:lnT w="6350" cap="flat" cmpd="sng" algn="ctr">
-                      <a:solidFill>
-                        <a:srgbClr val="E5E0D8"/>
-                      </a:solidFill>
-                      <a:prstDash val="solid"/>
-                      <a:round/>
-                      <a:headEnd type="none" w="med" len="med"/>
-                      <a:tailEnd type="none" w="med" len="med"/>
-                    </a:lnT>
-                    <a:lnB w="6350" cap="flat" cmpd="sng" algn="ctr">
-                      <a:solidFill>
-                        <a:srgbClr val="E5E0D8"/>
-                      </a:solidFill>
-                      <a:prstDash val="solid"/>
-                      <a:round/>
-                      <a:headEnd type="none" w="med" len="med"/>
-                      <a:tailEnd type="none" w="med" len="med"/>
-                    </a:lnB>
-                  </a:tcPr>
-                </a:tc>
-                <a:tc>
-                  <a:txBody>
-                    <a:bodyPr/>
-                    <a:lstStyle/>
-                    <a:p>
-                      <a:pPr algn="ctr" indent="0" marL="0">
-                        <a:buNone/>
-                      </a:pPr>
-                      <a:r>
-                        <a:rPr lang="en-US" sz="1600" dirty="0">
-                          <a:solidFill>
-                            <a:srgbClr val="1A1A1E"/>
-                          </a:solidFill>
-                          <a:latin typeface="Calibri" pitchFamily="34" charset="0"/>
-                          <a:ea typeface="Calibri" pitchFamily="34" charset="-122"/>
-                          <a:cs typeface="Calibri" pitchFamily="34" charset="-120"/>
-                        </a:rPr>
-                        <a:t>—</a:t>
-                      </a:r>
-                      <a:endParaRPr lang="en-US" sz="1600" dirty="0">
-                        <a:latin typeface="Calibri" charset="0"/>
-                        <a:ea typeface="Calibri" charset="0"/>
-                        <a:cs typeface="Calibri" charset="0"/>
-                      </a:endParaRPr>
-                    </a:p>
-                  </a:txBody>
-                  <a:tcPr marL="91440" marR="91440" marT="45720" marB="45720" anchor="ctr">
-                    <a:lnL w="6350" cap="flat" cmpd="sng" algn="ctr">
-                      <a:solidFill>
-                        <a:srgbClr val="E5E0D8"/>
-                      </a:solidFill>
-                      <a:prstDash val="solid"/>
-                      <a:round/>
-                      <a:headEnd type="none" w="med" len="med"/>
-                      <a:tailEnd type="none" w="med" len="med"/>
-                    </a:lnL>
-                    <a:lnR w="6350" cap="flat" cmpd="sng" algn="ctr">
-                      <a:solidFill>
-                        <a:srgbClr val="E5E0D8"/>
-                      </a:solidFill>
-                      <a:prstDash val="solid"/>
-                      <a:round/>
-                      <a:headEnd type="none" w="med" len="med"/>
-                      <a:tailEnd type="none" w="med" len="med"/>
-                    </a:lnR>
-                    <a:lnT w="6350" cap="flat" cmpd="sng" algn="ctr">
-                      <a:solidFill>
-                        <a:srgbClr val="E5E0D8"/>
-                      </a:solidFill>
-                      <a:prstDash val="solid"/>
-                      <a:round/>
-                      <a:headEnd type="none" w="med" len="med"/>
-                      <a:tailEnd type="none" w="med" len="med"/>
-                    </a:lnT>
-                    <a:lnB w="6350" cap="flat" cmpd="sng" algn="ctr">
-                      <a:solidFill>
-                        <a:srgbClr val="E5E0D8"/>
-                      </a:solidFill>
-                      <a:prstDash val="solid"/>
-                      <a:round/>
-                      <a:headEnd type="none" w="med" len="med"/>
-                      <a:tailEnd type="none" w="med" len="med"/>
-                    </a:lnB>
-                  </a:tcPr>
-                </a:tc>
-                <a:tc>
-                  <a:txBody>
-                    <a:bodyPr/>
-                    <a:lstStyle/>
-                    <a:p>
-                      <a:pPr algn="ctr" indent="0" marL="0">
-                        <a:buNone/>
-                      </a:pPr>
-                      <a:r>
-                        <a:rPr lang="en-US" sz="1600" dirty="0">
-                          <a:solidFill>
-                            <a:srgbClr val="1A1A1E"/>
-                          </a:solidFill>
-                          <a:latin typeface="Calibri" pitchFamily="34" charset="0"/>
-                          <a:ea typeface="Calibri" pitchFamily="34" charset="-122"/>
-                          <a:cs typeface="Calibri" pitchFamily="34" charset="-120"/>
-                        </a:rPr>
-                        <a:t>—</a:t>
-                      </a:r>
-                      <a:endParaRPr lang="en-US" sz="1600" dirty="0">
-                        <a:latin typeface="Calibri" charset="0"/>
-                        <a:ea typeface="Calibri" charset="0"/>
-                        <a:cs typeface="Calibri" charset="0"/>
-                      </a:endParaRPr>
-                    </a:p>
-                  </a:txBody>
-                  <a:tcPr marL="91440" marR="91440" marT="45720" marB="45720" anchor="ctr">
-                    <a:lnL w="6350" cap="flat" cmpd="sng" algn="ctr">
-                      <a:solidFill>
-                        <a:srgbClr val="E5E0D8"/>
-                      </a:solidFill>
-                      <a:prstDash val="solid"/>
-                      <a:round/>
-                      <a:headEnd type="none" w="med" len="med"/>
-                      <a:tailEnd type="none" w="med" len="med"/>
-                    </a:lnL>
-                    <a:lnR w="6350" cap="flat" cmpd="sng" algn="ctr">
-                      <a:solidFill>
-                        <a:srgbClr val="E5E0D8"/>
-                      </a:solidFill>
-                      <a:prstDash val="solid"/>
-                      <a:round/>
-                      <a:headEnd type="none" w="med" len="med"/>
-                      <a:tailEnd type="none" w="med" len="med"/>
-                    </a:lnR>
-                    <a:lnT w="6350" cap="flat" cmpd="sng" algn="ctr">
-                      <a:solidFill>
-                        <a:srgbClr val="E5E0D8"/>
-                      </a:solidFill>
-                      <a:prstDash val="solid"/>
-                      <a:round/>
-                      <a:headEnd type="none" w="med" len="med"/>
-                      <a:tailEnd type="none" w="med" len="med"/>
-                    </a:lnT>
-                    <a:lnB w="6350" cap="flat" cmpd="sng" algn="ctr">
-                      <a:solidFill>
-                        <a:srgbClr val="E5E0D8"/>
-                      </a:solidFill>
-                      <a:prstDash val="solid"/>
-                      <a:round/>
-                      <a:headEnd type="none" w="med" len="med"/>
-                      <a:tailEnd type="none" w="med" len="med"/>
-                    </a:lnB>
-                  </a:tcPr>
-                </a:tc>
-                <a:tc>
-                  <a:txBody>
-                    <a:bodyPr/>
-                    <a:lstStyle/>
-                    <a:p>
-                      <a:pPr algn="ctr" indent="0" marL="0">
-                        <a:buNone/>
-                      </a:pPr>
-                      <a:r>
-                        <a:rPr lang="en-US" sz="1600" dirty="0">
-                          <a:solidFill>
-                            <a:srgbClr val="1A1A1E"/>
-                          </a:solidFill>
-                          <a:latin typeface="Calibri" pitchFamily="34" charset="0"/>
-                          <a:ea typeface="Calibri" pitchFamily="34" charset="-122"/>
-                          <a:cs typeface="Calibri" pitchFamily="34" charset="-120"/>
-                        </a:rPr>
-                        <a:t>0.06</a:t>
-                      </a:r>
-                      <a:endParaRPr lang="en-US" sz="1600" dirty="0">
-                        <a:latin typeface="Calibri" charset="0"/>
-                        <a:ea typeface="Calibri" charset="0"/>
-                        <a:cs typeface="Calibri" charset="0"/>
-                      </a:endParaRPr>
-                    </a:p>
-                  </a:txBody>
-                  <a:tcPr marL="91440" marR="91440" marT="45720" marB="45720" anchor="ctr">
-                    <a:lnL w="6350" cap="flat" cmpd="sng" algn="ctr">
-                      <a:solidFill>
-                        <a:srgbClr val="E5E0D8"/>
-                      </a:solidFill>
-                      <a:prstDash val="solid"/>
-                      <a:round/>
-                      <a:headEnd type="none" w="med" len="med"/>
-                      <a:tailEnd type="none" w="med" len="med"/>
-                    </a:lnL>
-                    <a:lnR w="6350" cap="flat" cmpd="sng" algn="ctr">
-                      <a:solidFill>
-                        <a:srgbClr val="E5E0D8"/>
-                      </a:solidFill>
-                      <a:prstDash val="solid"/>
-                      <a:round/>
-                      <a:headEnd type="none" w="med" len="med"/>
-                      <a:tailEnd type="none" w="med" len="med"/>
-                    </a:lnR>
-                    <a:lnT w="6350" cap="flat" cmpd="sng" algn="ctr">
-                      <a:solidFill>
-                        <a:srgbClr val="E5E0D8"/>
-                      </a:solidFill>
-                      <a:prstDash val="solid"/>
-                      <a:round/>
-                      <a:headEnd type="none" w="med" len="med"/>
-                      <a:tailEnd type="none" w="med" len="med"/>
-                    </a:lnT>
-                    <a:lnB w="6350" cap="flat" cmpd="sng" algn="ctr">
-                      <a:solidFill>
-                        <a:srgbClr val="E5E0D8"/>
-                      </a:solidFill>
-                      <a:prstDash val="solid"/>
-                      <a:round/>
-                      <a:headEnd type="none" w="med" len="med"/>
-                      <a:tailEnd type="none" w="med" len="med"/>
-                    </a:lnB>
-                  </a:tcPr>
-                </a:tc>
-                <a:tc>
-                  <a:txBody>
-                    <a:bodyPr/>
-                    <a:lstStyle/>
-                    <a:p>
-                      <a:pPr algn="l" indent="0" marL="0">
-                        <a:buNone/>
-                      </a:pPr>
-                      <a:r>
-                        <a:rPr lang="en-US" sz="1600" dirty="0">
-                          <a:solidFill>
-                            <a:srgbClr val="6F6F6F"/>
-                          </a:solidFill>
-                          <a:latin typeface="Calibri" pitchFamily="34" charset="0"/>
-                          <a:ea typeface="Calibri" pitchFamily="34" charset="-122"/>
-                          <a:cs typeface="Calibri" pitchFamily="34" charset="-120"/>
-                        </a:rPr>
-                        <a:t>Unstable fold; rejected</a:t>
-                      </a:r>
-                      <a:endParaRPr lang="en-US" sz="1600" dirty="0">
-                        <a:latin typeface="Calibri" charset="0"/>
-                        <a:ea typeface="Calibri" charset="0"/>
-                        <a:cs typeface="Calibri" charset="0"/>
-                      </a:endParaRPr>
-                    </a:p>
-                  </a:txBody>
-                  <a:tcPr marL="91440" marR="91440" marT="45720" marB="45720" anchor="ctr">
-                    <a:lnL w="6350" cap="flat" cmpd="sng" algn="ctr">
-                      <a:solidFill>
-                        <a:srgbClr val="E5E0D8"/>
-                      </a:solidFill>
-                      <a:prstDash val="solid"/>
-                      <a:round/>
-                      <a:headEnd type="none" w="med" len="med"/>
-                      <a:tailEnd type="none" w="med" len="med"/>
-                    </a:lnL>
-                    <a:lnR w="6350" cap="flat" cmpd="sng" algn="ctr">
-                      <a:solidFill>
-                        <a:srgbClr val="E5E0D8"/>
-                      </a:solidFill>
-                      <a:prstDash val="solid"/>
-                      <a:round/>
-                      <a:headEnd type="none" w="med" len="med"/>
-                      <a:tailEnd type="none" w="med" len="med"/>
-                    </a:lnR>
-                    <a:lnT w="6350" cap="flat" cmpd="sng" algn="ctr">
-                      <a:solidFill>
-                        <a:srgbClr val="E5E0D8"/>
-                      </a:solidFill>
-                      <a:prstDash val="solid"/>
-                      <a:round/>
-                      <a:headEnd type="none" w="med" len="med"/>
-                      <a:tailEnd type="none" w="med" len="med"/>
-                    </a:lnT>
-                    <a:lnB w="6350" cap="flat" cmpd="sng" algn="ctr">
-                      <a:solidFill>
-                        <a:srgbClr val="E5E0D8"/>
-                      </a:solidFill>
-                      <a:prstDash val="solid"/>
-                      <a:round/>
-                      <a:headEnd type="none" w="med" len="med"/>
-                      <a:tailEnd type="none" w="med" len="med"/>
-                    </a:lnB>
-                  </a:tcPr>
-                </a:tc>
-              </a:tr>
-              <a:tr h="603504">
-                <a:tc>
-                  <a:txBody>
-                    <a:bodyPr/>
-                    <a:lstStyle/>
-                    <a:p>
-                      <a:pPr algn="l" indent="0" marL="0">
-                        <a:buNone/>
-                      </a:pPr>
-                      <a:r>
-                        <a:rPr lang="en-US" sz="1600" b="1" dirty="0">
-                          <a:solidFill>
-                            <a:srgbClr val="1A1A1E"/>
-                          </a:solidFill>
-                          <a:latin typeface="Calibri" pitchFamily="34" charset="0"/>
-                          <a:ea typeface="Calibri" pitchFamily="34" charset="-122"/>
-                          <a:cs typeface="Calibri" pitchFamily="34" charset="-120"/>
-                        </a:rPr>
-                        <a:t>CatBoost  (final)</a:t>
-                      </a:r>
-                      <a:endParaRPr lang="en-US" sz="1600" dirty="0">
-                        <a:latin typeface="Calibri" charset="0"/>
-                        <a:ea typeface="Calibri" charset="0"/>
-                        <a:cs typeface="Calibri" charset="0"/>
-                      </a:endParaRPr>
-                    </a:p>
-                  </a:txBody>
-                  <a:tcPr marL="91440" marR="91440" marT="45720" marB="45720" anchor="ctr">
-                    <a:lnL w="6350" cap="flat" cmpd="sng" algn="ctr">
-                      <a:solidFill>
-                        <a:srgbClr val="E5E0D8"/>
-                      </a:solidFill>
-                      <a:prstDash val="solid"/>
-                      <a:round/>
-                      <a:headEnd type="none" w="med" len="med"/>
-                      <a:tailEnd type="none" w="med" len="med"/>
-                    </a:lnL>
-                    <a:lnR w="6350" cap="flat" cmpd="sng" algn="ctr">
-                      <a:solidFill>
-                        <a:srgbClr val="E5E0D8"/>
-                      </a:solidFill>
-                      <a:prstDash val="solid"/>
-                      <a:round/>
-                      <a:headEnd type="none" w="med" len="med"/>
-                      <a:tailEnd type="none" w="med" len="med"/>
-                    </a:lnR>
-                    <a:lnT w="6350" cap="flat" cmpd="sng" algn="ctr">
-                      <a:solidFill>
-                        <a:srgbClr val="E5E0D8"/>
-                      </a:solidFill>
-                      <a:prstDash val="solid"/>
-                      <a:round/>
-                      <a:headEnd type="none" w="med" len="med"/>
-                      <a:tailEnd type="none" w="med" len="med"/>
-                    </a:lnT>
-                    <a:lnB w="6350" cap="flat" cmpd="sng" algn="ctr">
-                      <a:solidFill>
-                        <a:srgbClr val="E5E0D8"/>
-                      </a:solidFill>
-                      <a:prstDash val="solid"/>
-                      <a:round/>
-                      <a:headEnd type="none" w="med" len="med"/>
-                      <a:tailEnd type="none" w="med" len="med"/>
-                    </a:lnB>
+                  <a:tcPr anchor="ctr" marL="80000" marR="60000" marT="20000" marB="20000">
                     <a:solidFill>
                       <a:srgbClr val="EFE7D5"/>
                     </a:solidFill>
@@ -8030,64 +6639,19 @@
                     <a:bodyPr/>
                     <a:lstStyle/>
                     <a:p>
-                      <a:pPr algn="ctr" indent="0" marL="0">
-                        <a:buNone/>
-                      </a:pPr>
+                      <a:pPr algn="ctr"/>
                       <a:r>
-                        <a:rPr lang="en-US" sz="1600" b="1" dirty="0">
+                        <a:rPr sz="1200" b="1">
                           <a:solidFill>
                             <a:srgbClr val="C9A96E"/>
                           </a:solidFill>
-                          <a:latin typeface="Calibri" pitchFamily="34" charset="0"/>
-                          <a:ea typeface="Calibri" pitchFamily="34" charset="-122"/>
-                          <a:cs typeface="Calibri" pitchFamily="34" charset="-120"/>
+                          <a:latin typeface="Calibri"/>
                         </a:rPr>
                         <a:t>3.863</a:t>
                       </a:r>
-                      <a:endParaRPr lang="en-US" sz="1600" dirty="0">
-                        <a:latin typeface="Calibri" charset="0"/>
-                        <a:ea typeface="Calibri" charset="0"/>
-                        <a:cs typeface="Calibri" charset="0"/>
-                      </a:endParaRPr>
                     </a:p>
                   </a:txBody>
-                  <a:tcPr marL="91440" marR="91440" marT="45720" marB="45720" anchor="ctr">
-                    <a:lnL w="6350" cap="flat" cmpd="sng" algn="ctr">
-                      <a:solidFill>
-                        <a:srgbClr val="E5E0D8"/>
-                      </a:solidFill>
-                      <a:prstDash val="solid"/>
-                      <a:round/>
-                      <a:headEnd type="none" w="med" len="med"/>
-                      <a:tailEnd type="none" w="med" len="med"/>
-                    </a:lnL>
-                    <a:lnR w="6350" cap="flat" cmpd="sng" algn="ctr">
-                      <a:solidFill>
-                        <a:srgbClr val="E5E0D8"/>
-                      </a:solidFill>
-                      <a:prstDash val="solid"/>
-                      <a:round/>
-                      <a:headEnd type="none" w="med" len="med"/>
-                      <a:tailEnd type="none" w="med" len="med"/>
-                    </a:lnR>
-                    <a:lnT w="6350" cap="flat" cmpd="sng" algn="ctr">
-                      <a:solidFill>
-                        <a:srgbClr val="E5E0D8"/>
-                      </a:solidFill>
-                      <a:prstDash val="solid"/>
-                      <a:round/>
-                      <a:headEnd type="none" w="med" len="med"/>
-                      <a:tailEnd type="none" w="med" len="med"/>
-                    </a:lnT>
-                    <a:lnB w="6350" cap="flat" cmpd="sng" algn="ctr">
-                      <a:solidFill>
-                        <a:srgbClr val="E5E0D8"/>
-                      </a:solidFill>
-                      <a:prstDash val="solid"/>
-                      <a:round/>
-                      <a:headEnd type="none" w="med" len="med"/>
-                      <a:tailEnd type="none" w="med" len="med"/>
-                    </a:lnB>
+                  <a:tcPr anchor="ctr" marL="80000" marR="60000" marT="20000" marB="20000">
                     <a:solidFill>
                       <a:srgbClr val="EFE7D5"/>
                     </a:solidFill>
@@ -8098,64 +6662,19 @@
                     <a:bodyPr/>
                     <a:lstStyle/>
                     <a:p>
-                      <a:pPr algn="ctr" indent="0" marL="0">
-                        <a:buNone/>
-                      </a:pPr>
+                      <a:pPr algn="ctr"/>
                       <a:r>
-                        <a:rPr lang="en-US" sz="1600" b="1" dirty="0">
+                        <a:rPr sz="1200" b="1">
                           <a:solidFill>
                             <a:srgbClr val="C9A96E"/>
                           </a:solidFill>
-                          <a:latin typeface="Calibri" pitchFamily="34" charset="0"/>
-                          <a:ea typeface="Calibri" pitchFamily="34" charset="-122"/>
-                          <a:cs typeface="Calibri" pitchFamily="34" charset="-120"/>
+                          <a:latin typeface="Calibri"/>
                         </a:rPr>
                         <a:t>3.872</a:t>
                       </a:r>
-                      <a:endParaRPr lang="en-US" sz="1600" dirty="0">
-                        <a:latin typeface="Calibri" charset="0"/>
-                        <a:ea typeface="Calibri" charset="0"/>
-                        <a:cs typeface="Calibri" charset="0"/>
-                      </a:endParaRPr>
                     </a:p>
                   </a:txBody>
-                  <a:tcPr marL="91440" marR="91440" marT="45720" marB="45720" anchor="ctr">
-                    <a:lnL w="6350" cap="flat" cmpd="sng" algn="ctr">
-                      <a:solidFill>
-                        <a:srgbClr val="E5E0D8"/>
-                      </a:solidFill>
-                      <a:prstDash val="solid"/>
-                      <a:round/>
-                      <a:headEnd type="none" w="med" len="med"/>
-                      <a:tailEnd type="none" w="med" len="med"/>
-                    </a:lnL>
-                    <a:lnR w="6350" cap="flat" cmpd="sng" algn="ctr">
-                      <a:solidFill>
-                        <a:srgbClr val="E5E0D8"/>
-                      </a:solidFill>
-                      <a:prstDash val="solid"/>
-                      <a:round/>
-                      <a:headEnd type="none" w="med" len="med"/>
-                      <a:tailEnd type="none" w="med" len="med"/>
-                    </a:lnR>
-                    <a:lnT w="6350" cap="flat" cmpd="sng" algn="ctr">
-                      <a:solidFill>
-                        <a:srgbClr val="E5E0D8"/>
-                      </a:solidFill>
-                      <a:prstDash val="solid"/>
-                      <a:round/>
-                      <a:headEnd type="none" w="med" len="med"/>
-                      <a:tailEnd type="none" w="med" len="med"/>
-                    </a:lnT>
-                    <a:lnB w="6350" cap="flat" cmpd="sng" algn="ctr">
-                      <a:solidFill>
-                        <a:srgbClr val="E5E0D8"/>
-                      </a:solidFill>
-                      <a:prstDash val="solid"/>
-                      <a:round/>
-                      <a:headEnd type="none" w="med" len="med"/>
-                      <a:tailEnd type="none" w="med" len="med"/>
-                    </a:lnB>
+                  <a:tcPr anchor="ctr" marL="80000" marR="60000" marT="20000" marB="20000">
                     <a:solidFill>
                       <a:srgbClr val="EFE7D5"/>
                     </a:solidFill>
@@ -8166,64 +6685,19 @@
                     <a:bodyPr/>
                     <a:lstStyle/>
                     <a:p>
-                      <a:pPr algn="ctr" indent="0" marL="0">
-                        <a:buNone/>
-                      </a:pPr>
+                      <a:pPr algn="ctr"/>
                       <a:r>
-                        <a:rPr lang="en-US" sz="1600" dirty="0">
+                        <a:rPr sz="1200" b="1">
                           <a:solidFill>
                             <a:srgbClr val="1A1A1E"/>
                           </a:solidFill>
-                          <a:latin typeface="Calibri" pitchFamily="34" charset="0"/>
-                          <a:ea typeface="Calibri" pitchFamily="34" charset="-122"/>
-                          <a:cs typeface="Calibri" pitchFamily="34" charset="-120"/>
+                          <a:latin typeface="Calibri"/>
                         </a:rPr>
                         <a:t>2.902</a:t>
                       </a:r>
-                      <a:endParaRPr lang="en-US" sz="1600" dirty="0">
-                        <a:latin typeface="Calibri" charset="0"/>
-                        <a:ea typeface="Calibri" charset="0"/>
-                        <a:cs typeface="Calibri" charset="0"/>
-                      </a:endParaRPr>
                     </a:p>
                   </a:txBody>
-                  <a:tcPr marL="91440" marR="91440" marT="45720" marB="45720" anchor="ctr">
-                    <a:lnL w="6350" cap="flat" cmpd="sng" algn="ctr">
-                      <a:solidFill>
-                        <a:srgbClr val="E5E0D8"/>
-                      </a:solidFill>
-                      <a:prstDash val="solid"/>
-                      <a:round/>
-                      <a:headEnd type="none" w="med" len="med"/>
-                      <a:tailEnd type="none" w="med" len="med"/>
-                    </a:lnL>
-                    <a:lnR w="6350" cap="flat" cmpd="sng" algn="ctr">
-                      <a:solidFill>
-                        <a:srgbClr val="E5E0D8"/>
-                      </a:solidFill>
-                      <a:prstDash val="solid"/>
-                      <a:round/>
-                      <a:headEnd type="none" w="med" len="med"/>
-                      <a:tailEnd type="none" w="med" len="med"/>
-                    </a:lnR>
-                    <a:lnT w="6350" cap="flat" cmpd="sng" algn="ctr">
-                      <a:solidFill>
-                        <a:srgbClr val="E5E0D8"/>
-                      </a:solidFill>
-                      <a:prstDash val="solid"/>
-                      <a:round/>
-                      <a:headEnd type="none" w="med" len="med"/>
-                      <a:tailEnd type="none" w="med" len="med"/>
-                    </a:lnT>
-                    <a:lnB w="6350" cap="flat" cmpd="sng" algn="ctr">
-                      <a:solidFill>
-                        <a:srgbClr val="E5E0D8"/>
-                      </a:solidFill>
-                      <a:prstDash val="solid"/>
-                      <a:round/>
-                      <a:headEnd type="none" w="med" len="med"/>
-                      <a:tailEnd type="none" w="med" len="med"/>
-                    </a:lnB>
+                  <a:tcPr anchor="ctr" marL="80000" marR="60000" marT="20000" marB="20000">
                     <a:solidFill>
                       <a:srgbClr val="EFE7D5"/>
                     </a:solidFill>
@@ -8234,132 +6708,19 @@
                     <a:bodyPr/>
                     <a:lstStyle/>
                     <a:p>
-                      <a:pPr algn="ctr" indent="0" marL="0">
-                        <a:buNone/>
-                      </a:pPr>
+                      <a:pPr algn="ctr"/>
                       <a:r>
-                        <a:rPr lang="en-US" sz="1600" dirty="0">
+                        <a:rPr sz="1200" b="1">
                           <a:solidFill>
                             <a:srgbClr val="1A1A1E"/>
                           </a:solidFill>
-                          <a:latin typeface="Calibri" pitchFamily="34" charset="0"/>
-                          <a:ea typeface="Calibri" pitchFamily="34" charset="-122"/>
-                          <a:cs typeface="Calibri" pitchFamily="34" charset="-120"/>
+                          <a:latin typeface="Calibri"/>
                         </a:rPr>
                         <a:t>0.465</a:t>
                       </a:r>
-                      <a:endParaRPr lang="en-US" sz="1600" dirty="0">
-                        <a:latin typeface="Calibri" charset="0"/>
-                        <a:ea typeface="Calibri" charset="0"/>
-                        <a:cs typeface="Calibri" charset="0"/>
-                      </a:endParaRPr>
                     </a:p>
                   </a:txBody>
-                  <a:tcPr marL="91440" marR="91440" marT="45720" marB="45720" anchor="ctr">
-                    <a:lnL w="6350" cap="flat" cmpd="sng" algn="ctr">
-                      <a:solidFill>
-                        <a:srgbClr val="E5E0D8"/>
-                      </a:solidFill>
-                      <a:prstDash val="solid"/>
-                      <a:round/>
-                      <a:headEnd type="none" w="med" len="med"/>
-                      <a:tailEnd type="none" w="med" len="med"/>
-                    </a:lnL>
-                    <a:lnR w="6350" cap="flat" cmpd="sng" algn="ctr">
-                      <a:solidFill>
-                        <a:srgbClr val="E5E0D8"/>
-                      </a:solidFill>
-                      <a:prstDash val="solid"/>
-                      <a:round/>
-                      <a:headEnd type="none" w="med" len="med"/>
-                      <a:tailEnd type="none" w="med" len="med"/>
-                    </a:lnR>
-                    <a:lnT w="6350" cap="flat" cmpd="sng" algn="ctr">
-                      <a:solidFill>
-                        <a:srgbClr val="E5E0D8"/>
-                      </a:solidFill>
-                      <a:prstDash val="solid"/>
-                      <a:round/>
-                      <a:headEnd type="none" w="med" len="med"/>
-                      <a:tailEnd type="none" w="med" len="med"/>
-                    </a:lnT>
-                    <a:lnB w="6350" cap="flat" cmpd="sng" algn="ctr">
-                      <a:solidFill>
-                        <a:srgbClr val="E5E0D8"/>
-                      </a:solidFill>
-                      <a:prstDash val="solid"/>
-                      <a:round/>
-                      <a:headEnd type="none" w="med" len="med"/>
-                      <a:tailEnd type="none" w="med" len="med"/>
-                    </a:lnB>
-                    <a:solidFill>
-                      <a:srgbClr val="EFE7D5"/>
-                    </a:solidFill>
-                  </a:tcPr>
-                </a:tc>
-                <a:tc>
-                  <a:txBody>
-                    <a:bodyPr/>
-                    <a:lstStyle/>
-                    <a:p>
-                      <a:pPr algn="l" indent="0" marL="0">
-                        <a:buNone/>
-                      </a:pPr>
-                      <a:r>
-                        <a:rPr lang="en-US" sz="1600" dirty="0">
-                          <a:solidFill>
-                            <a:srgbClr val="1A1A1E"/>
-                          </a:solidFill>
-                          <a:latin typeface="Calibri" pitchFamily="34" charset="0"/>
-                          <a:ea typeface="Calibri" pitchFamily="34" charset="-122"/>
-                          <a:cs typeface="Calibri" pitchFamily="34" charset="-120"/>
-                        </a:rPr>
-                        <a:t>Optuna-tuned — selected model</a:t>
-                      </a:r>
-                      <a:endParaRPr lang="en-US" sz="1600" dirty="0">
-                        <a:latin typeface="Calibri" charset="0"/>
-                        <a:ea typeface="Calibri" charset="0"/>
-                        <a:cs typeface="Calibri" charset="0"/>
-                      </a:endParaRPr>
-                    </a:p>
-                  </a:txBody>
-                  <a:tcPr marL="91440" marR="91440" marT="45720" marB="45720" anchor="ctr">
-                    <a:lnL w="6350" cap="flat" cmpd="sng" algn="ctr">
-                      <a:solidFill>
-                        <a:srgbClr val="E5E0D8"/>
-                      </a:solidFill>
-                      <a:prstDash val="solid"/>
-                      <a:round/>
-                      <a:headEnd type="none" w="med" len="med"/>
-                      <a:tailEnd type="none" w="med" len="med"/>
-                    </a:lnL>
-                    <a:lnR w="6350" cap="flat" cmpd="sng" algn="ctr">
-                      <a:solidFill>
-                        <a:srgbClr val="E5E0D8"/>
-                      </a:solidFill>
-                      <a:prstDash val="solid"/>
-                      <a:round/>
-                      <a:headEnd type="none" w="med" len="med"/>
-                      <a:tailEnd type="none" w="med" len="med"/>
-                    </a:lnR>
-                    <a:lnT w="6350" cap="flat" cmpd="sng" algn="ctr">
-                      <a:solidFill>
-                        <a:srgbClr val="E5E0D8"/>
-                      </a:solidFill>
-                      <a:prstDash val="solid"/>
-                      <a:round/>
-                      <a:headEnd type="none" w="med" len="med"/>
-                      <a:tailEnd type="none" w="med" len="med"/>
-                    </a:lnT>
-                    <a:lnB w="6350" cap="flat" cmpd="sng" algn="ctr">
-                      <a:solidFill>
-                        <a:srgbClr val="E5E0D8"/>
-                      </a:solidFill>
-                      <a:prstDash val="solid"/>
-                      <a:round/>
-                      <a:headEnd type="none" w="med" len="med"/>
-                      <a:tailEnd type="none" w="med" len="med"/>
-                    </a:lnB>
+                  <a:tcPr anchor="ctr" marL="80000" marR="60000" marT="20000" marB="20000">
                     <a:solidFill>
                       <a:srgbClr val="EFE7D5"/>
                     </a:solidFill>
@@ -8372,79 +6733,72 @@
       </p:graphicFrame>
       <p:sp>
         <p:nvSpPr>
-          <p:cNvPr id="7" name="Text 4"/>
-          <p:cNvSpPr/>
-          <p:nvPr/>
-        </p:nvSpPr>
-        <p:spPr>
-          <a:xfrm>
-            <a:off x="566928" y="6053328"/>
-            <a:ext cx="11057839" cy="365760"/>
-          </a:xfrm>
-          <a:prstGeom prst="rect">
-            <a:avLst/>
-          </a:prstGeom>
-          <a:noFill/>
-          <a:ln/>
-        </p:spPr>
-        <p:txBody>
-          <a:bodyPr wrap="square" lIns="0" tIns="0" rIns="0" bIns="0" rtlCol="0" anchor="ctr"/>
-          <a:lstStyle/>
-          <a:p>
-            <a:pPr indent="0" marL="0">
-              <a:buNone/>
-            </a:pPr>
-            <a:r>
-              <a:rPr lang="en-US" sz="1600" dirty="0">
-                <a:solidFill>
-                  <a:srgbClr val="6F6F6F"/>
-                </a:solidFill>
-                <a:latin typeface="Calibri" pitchFamily="34" charset="0"/>
-                <a:ea typeface="Calibri" pitchFamily="34" charset="-122"/>
-                <a:cs typeface="Calibri" pitchFamily="34" charset="-120"/>
-              </a:rPr>
-              <a:t>Tree ensembles beat the single-tree and neural-net baselines; CatBoost wins on validation RMSE (3.87) and MAE (2.90) and is used for the test-set submission.</a:t>
-            </a:r>
-            <a:endParaRPr lang="en-US" sz="1600" dirty="0"/>
-          </a:p>
-        </p:txBody>
-      </p:sp>
-      <p:sp>
-        <p:nvSpPr>
-          <p:cNvPr id="8" name="Text 5"/>
-          <p:cNvSpPr/>
-          <p:nvPr/>
-        </p:nvSpPr>
-        <p:spPr>
-          <a:xfrm>
-            <a:off x="10972800" y="6364224"/>
-            <a:ext cx="649224" cy="310896"/>
-          </a:xfrm>
-          <a:prstGeom prst="rect">
-            <a:avLst/>
-          </a:prstGeom>
-          <a:noFill/>
-          <a:ln/>
-        </p:spPr>
-        <p:txBody>
-          <a:bodyPr wrap="square" lIns="0" tIns="0" rIns="0" bIns="0" rtlCol="0" anchor="ctr"/>
-          <a:lstStyle/>
-          <a:p>
-            <a:pPr algn="r" indent="0" marL="0">
-              <a:buNone/>
-            </a:pPr>
-            <a:r>
-              <a:rPr lang="en-US" sz="1600" dirty="0">
-                <a:solidFill>
-                  <a:srgbClr val="6F6F6F"/>
-                </a:solidFill>
-                <a:latin typeface="Calibri" pitchFamily="34" charset="0"/>
-                <a:ea typeface="Calibri" pitchFamily="34" charset="-122"/>
-                <a:cs typeface="Calibri" pitchFamily="34" charset="-120"/>
-              </a:rPr>
-              <a:t>05</a:t>
-            </a:r>
-            <a:endParaRPr lang="en-US" sz="1600" dirty="0"/>
+          <p:cNvPr id="11" name="TextBox 10"/>
+          <p:cNvSpPr txBox="1"/>
+          <p:nvPr/>
+        </p:nvSpPr>
+        <p:spPr>
+          <a:xfrm>
+            <a:off x="6600000" y="5430000"/>
+            <a:ext cx="5024767" cy="620000"/>
+          </a:xfrm>
+          <a:prstGeom prst="rect">
+            <a:avLst/>
+          </a:prstGeom>
+          <a:noFill/>
+        </p:spPr>
+        <p:txBody>
+          <a:bodyPr wrap="square" lIns="0" rIns="0" tIns="0" bIns="0">
+            <a:spAutoFit/>
+          </a:bodyPr>
+          <a:lstStyle/>
+          <a:p>
+            <a:pPr>
+              <a:lnSpc>
+                <a:spcPct val="100000"/>
+              </a:lnSpc>
+              <a:spcAft>
+                <a:spcPts val="400"/>
+              </a:spcAft>
+            </a:pPr>
+            <a:r>
+              <a:rPr sz="1150" b="1">
+                <a:solidFill>
+                  <a:srgbClr val="C9A96E"/>
+                </a:solidFill>
+                <a:latin typeface="Calibri"/>
+              </a:rPr>
+              <a:t>✓  </a:t>
+            </a:r>
+            <a:r>
+              <a:rPr sz="1150" b="1">
+                <a:solidFill>
+                  <a:srgbClr val="1A1A1E"/>
+                </a:solidFill>
+                <a:latin typeface="Calibri"/>
+              </a:rPr>
+              <a:t>CatBoost edges XGBoost</a:t>
+            </a:r>
+            <a:r>
+              <a:rPr sz="1150" b="0">
+                <a:solidFill>
+                  <a:srgbClr val="6E6A5C"/>
+                </a:solidFill>
+                <a:latin typeface="Calibri"/>
+              </a:rPr>
+              <a:t> and its cross-check (3.86) matches the hold-out (3.87) — not overfit.</a:t>
+            </a:r>
+          </a:p>
+          <a:p>
+            <a:r>
+              <a:rPr sz="950" i="1">
+                <a:solidFill>
+                  <a:srgbClr val="6E6A5C"/>
+                </a:solidFill>
+                <a:latin typeface="Calibri"/>
+              </a:rPr>
+              <a:t>—  = metric not recorded for that model.</a:t>
+            </a:r>
           </a:p>
         </p:txBody>
       </p:sp>
